--- a/DEE2025 workshop slides Becker Zhu present.pptx
+++ b/DEE2025 workshop slides Becker Zhu present.pptx
@@ -6554,7 +6554,7 @@
           <a:p>
             <a:fld id="{B9646C07-FEB6-A24A-825A-896B832821A6}" type="datetimeFigureOut">
               <a:rPr lang="en-US" smtClean="0"/>
-              <a:t>9/10/2025</a:t>
+              <a:t>9/11/2025</a:t>
             </a:fld>
             <a:endParaRPr lang="en-US"/>
           </a:p>
@@ -7835,7 +7835,7 @@
           <a:p>
             <a:fld id="{71FA5425-D0E0-484F-B15E-0A4EA02E289E}" type="datetime1">
               <a:rPr lang="en-GB" smtClean="0"/>
-              <a:t>10/09/2025</a:t>
+              <a:t>11/09/2025</a:t>
             </a:fld>
             <a:endParaRPr lang="en-US"/>
           </a:p>
@@ -8035,7 +8035,7 @@
           <a:p>
             <a:fld id="{987EFAB7-DC2F-4341-A3F4-3B259F642E64}" type="datetime1">
               <a:rPr lang="en-GB" smtClean="0"/>
-              <a:t>10/09/2025</a:t>
+              <a:t>11/09/2025</a:t>
             </a:fld>
             <a:endParaRPr lang="en-US"/>
           </a:p>
@@ -8245,7 +8245,7 @@
           <a:p>
             <a:fld id="{9A929D7A-6CF4-C549-8943-5949BE4713C0}" type="datetime1">
               <a:rPr lang="en-GB" smtClean="0"/>
-              <a:t>10/09/2025</a:t>
+              <a:t>11/09/2025</a:t>
             </a:fld>
             <a:endParaRPr lang="en-US"/>
           </a:p>
@@ -8445,7 +8445,7 @@
           <a:p>
             <a:fld id="{86CDD7E2-17AC-6446-8903-FFCACE8EEA26}" type="datetime1">
               <a:rPr lang="en-GB" smtClean="0"/>
-              <a:t>10/09/2025</a:t>
+              <a:t>11/09/2025</a:t>
             </a:fld>
             <a:endParaRPr lang="en-US"/>
           </a:p>
@@ -8721,7 +8721,7 @@
           <a:p>
             <a:fld id="{E03976D6-966A-D142-8529-9E7031701B8F}" type="datetime1">
               <a:rPr lang="en-GB" smtClean="0"/>
-              <a:t>10/09/2025</a:t>
+              <a:t>11/09/2025</a:t>
             </a:fld>
             <a:endParaRPr lang="en-US"/>
           </a:p>
@@ -8989,7 +8989,7 @@
           <a:p>
             <a:fld id="{7D51280D-8B40-964A-9FB5-9FB05CBC6AE6}" type="datetime1">
               <a:rPr lang="en-GB" smtClean="0"/>
-              <a:t>10/09/2025</a:t>
+              <a:t>11/09/2025</a:t>
             </a:fld>
             <a:endParaRPr lang="en-US"/>
           </a:p>
@@ -9404,7 +9404,7 @@
           <a:p>
             <a:fld id="{2E4D55EC-1300-934C-A307-97BF0D87F4B8}" type="datetime1">
               <a:rPr lang="en-GB" smtClean="0"/>
-              <a:t>10/09/2025</a:t>
+              <a:t>11/09/2025</a:t>
             </a:fld>
             <a:endParaRPr lang="en-US"/>
           </a:p>
@@ -9546,7 +9546,7 @@
           <a:p>
             <a:fld id="{CEDA83F1-7D91-A447-8BC1-6454E5928C32}" type="datetime1">
               <a:rPr lang="en-GB" smtClean="0"/>
-              <a:t>10/09/2025</a:t>
+              <a:t>11/09/2025</a:t>
             </a:fld>
             <a:endParaRPr lang="en-US"/>
           </a:p>
@@ -9659,7 +9659,7 @@
           <a:p>
             <a:fld id="{BB2F8029-4CC3-9447-8737-15AB747FDC2F}" type="datetime1">
               <a:rPr lang="en-GB" smtClean="0"/>
-              <a:t>10/09/2025</a:t>
+              <a:t>11/09/2025</a:t>
             </a:fld>
             <a:endParaRPr lang="en-US"/>
           </a:p>
@@ -9972,7 +9972,7 @@
           <a:p>
             <a:fld id="{C94F589B-65DF-5F41-A074-7AE6E4159B30}" type="datetime1">
               <a:rPr lang="en-GB" smtClean="0"/>
-              <a:t>10/09/2025</a:t>
+              <a:t>11/09/2025</a:t>
             </a:fld>
             <a:endParaRPr lang="en-US"/>
           </a:p>
@@ -10261,7 +10261,7 @@
           <a:p>
             <a:fld id="{5F98D526-017B-6545-BB5E-DA0E3938C22C}" type="datetime1">
               <a:rPr lang="en-GB" smtClean="0"/>
-              <a:t>10/09/2025</a:t>
+              <a:t>11/09/2025</a:t>
             </a:fld>
             <a:endParaRPr lang="en-US"/>
           </a:p>
@@ -10504,7 +10504,7 @@
           <a:p>
             <a:fld id="{6387B4AE-C3DB-F74E-B579-B56945C49C81}" type="datetime1">
               <a:rPr lang="en-GB" smtClean="0"/>
-              <a:t>10/09/2025</a:t>
+              <a:t>11/09/2025</a:t>
             </a:fld>
             <a:endParaRPr lang="en-US"/>
           </a:p>
@@ -18116,12 +18116,6 @@
             <a:r>
               <a:rPr lang="en-GB" dirty="0"/>
               <a:t>Evaluation Evidence (Case Study: Aston, Manchester)</a:t>
-            </a:r>
-          </a:p>
-          <a:p>
-            <a:r>
-              <a:rPr lang="en-GB" dirty="0"/>
-              <a:t>Interactive Activities</a:t>
             </a:r>
           </a:p>
           <a:p>
@@ -24706,17 +24700,25 @@
           <a:p>
             <a:r>
               <a:rPr lang="en-US" b="1" dirty="0"/>
-              <a:t>Interactive Activities</a:t>
+              <a:t>Complete </a:t>
+            </a:r>
+            <a:r>
+              <a:rPr lang="en-US" b="1" dirty="0" err="1"/>
+              <a:t>Workthrough</a:t>
+            </a:r>
+            <a:r>
+              <a:rPr lang="en-US" b="1" dirty="0"/>
+              <a:t> and Templates</a:t>
             </a:r>
           </a:p>
         </p:txBody>
       </p:sp>
       <p:sp>
         <p:nvSpPr>
-          <p:cNvPr id="3" name="Content Placeholder 2">
+          <p:cNvPr id="5" name="Content Placeholder 4">
             <a:extLst>
               <a:ext uri="{FF2B5EF4-FFF2-40B4-BE49-F238E27FC236}">
-                <a16:creationId xmlns:a16="http://schemas.microsoft.com/office/drawing/2014/main" id="{D2FC0861-9226-2BB8-B3FF-0648B971E549}"/>
+                <a16:creationId xmlns:a16="http://schemas.microsoft.com/office/drawing/2014/main" id="{9CEDCF1E-2A7B-ADA3-8EC4-88A8D88C5D8D}"/>
               </a:ext>
             </a:extLst>
           </p:cNvPr>
@@ -24729,69 +24731,94 @@
         </p:nvSpPr>
         <p:spPr/>
         <p:txBody>
-          <a:bodyPr>
-            <a:normAutofit lnSpcReduction="10000"/>
+          <a:bodyPr/>
+          <a:lstStyle/>
+          <a:p>
+            <a:r>
+              <a:rPr lang="en-GB" dirty="0"/>
+              <a:t>DEE2025 Coding </a:t>
+            </a:r>
+            <a:r>
+              <a:rPr lang="en-GB" dirty="0" err="1"/>
+              <a:t>Github</a:t>
+            </a:r>
+            <a:r>
+              <a:rPr lang="en-GB" dirty="0"/>
+              <a:t> page</a:t>
+            </a:r>
+          </a:p>
+        </p:txBody>
+      </p:sp>
+      <p:pic>
+        <p:nvPicPr>
+          <p:cNvPr id="7" name="Picture 6" descr="A qr code on a white background&#10;&#10;AI-generated content may be incorrect.">
+            <a:extLst>
+              <a:ext uri="{FF2B5EF4-FFF2-40B4-BE49-F238E27FC236}">
+                <a16:creationId xmlns:a16="http://schemas.microsoft.com/office/drawing/2014/main" id="{AB721F09-844E-BA7F-9952-DEAB144E6D82}"/>
+              </a:ext>
+            </a:extLst>
+          </p:cNvPr>
+          <p:cNvPicPr>
+            <a:picLocks noChangeAspect="1"/>
+          </p:cNvPicPr>
+          <p:nvPr/>
+        </p:nvPicPr>
+        <p:blipFill>
+          <a:blip r:embed="rId3"/>
+          <a:stretch>
+            <a:fillRect/>
+          </a:stretch>
+        </p:blipFill>
+        <p:spPr>
+          <a:xfrm>
+            <a:off x="8593330" y="2569083"/>
+            <a:ext cx="2122430" cy="2743200"/>
+          </a:xfrm>
+          <a:prstGeom prst="rect">
+            <a:avLst/>
+          </a:prstGeom>
+        </p:spPr>
+      </p:pic>
+      <p:sp>
+        <p:nvSpPr>
+          <p:cNvPr id="8" name="TextBox 7">
+            <a:extLst>
+              <a:ext uri="{FF2B5EF4-FFF2-40B4-BE49-F238E27FC236}">
+                <a16:creationId xmlns:a16="http://schemas.microsoft.com/office/drawing/2014/main" id="{B4F02907-6B65-FB1B-C29B-7FE9B4838D67}"/>
+              </a:ext>
+            </a:extLst>
+          </p:cNvPr>
+          <p:cNvSpPr txBox="1"/>
+          <p:nvPr/>
+        </p:nvSpPr>
+        <p:spPr>
+          <a:xfrm>
+            <a:off x="4716820" y="5771746"/>
+            <a:ext cx="6094476" cy="830997"/>
+          </a:xfrm>
+          <a:prstGeom prst="rect">
+            <a:avLst/>
+          </a:prstGeom>
+          <a:noFill/>
+        </p:spPr>
+        <p:txBody>
+          <a:bodyPr wrap="square">
+            <a:spAutoFit/>
           </a:bodyPr>
           <a:lstStyle/>
           <a:p>
-            <a:pPr marL="0" indent="0">
-              <a:buNone/>
-            </a:pPr>
-            <a:r>
-              <a:rPr lang="en-US" sz="2400" dirty="0"/>
-              <a:t>Climate Change Data</a:t>
-            </a:r>
-          </a:p>
-          <a:p>
-            <a:pPr marL="0" indent="0">
-              <a:buNone/>
-            </a:pPr>
-            <a:endParaRPr lang="en-US" dirty="0"/>
-          </a:p>
-          <a:p>
-            <a:pPr marL="0" indent="0">
-              <a:buNone/>
-            </a:pPr>
-            <a:r>
-              <a:rPr lang="en-GB" sz="2200" dirty="0"/>
-              <a:t>Idea: </a:t>
-            </a:r>
-          </a:p>
-          <a:p>
-            <a:r>
-              <a:rPr lang="en-GB" sz="2200" b="1" dirty="0"/>
-              <a:t>Step 1:</a:t>
-            </a:r>
-            <a:r>
-              <a:rPr lang="en-GB" sz="2200" dirty="0"/>
-              <a:t> Present the complete climate change data walkthrough (HTML) with fill-in-the-blank code lines and interactive exercises. This gives the audience a clear picture of the final output we’re aiming for.</a:t>
-            </a:r>
-          </a:p>
-          <a:p>
-            <a:r>
-              <a:rPr lang="en-GB" sz="2200" b="1" dirty="0"/>
-              <a:t>Step 2:</a:t>
-            </a:r>
-            <a:r>
-              <a:rPr lang="en-GB" sz="2200" dirty="0"/>
-              <a:t> Provide the incomplete version of the climate change data R Markdown file (without the fill-in-the-blank code lines or interactive exercises) via a GitHub link or Posit Cloud. This version skips the text like aim and preparation to save time, allowing participants to focus on building the interactive components.</a:t>
-            </a:r>
-          </a:p>
-          <a:p>
-            <a:r>
-              <a:rPr lang="en-GB" sz="2200" b="1" dirty="0"/>
-              <a:t>Step 3:</a:t>
-            </a:r>
-            <a:r>
-              <a:rPr lang="en-GB" sz="2200" dirty="0"/>
-              <a:t> Guide the audience through adding the fill-in-the-blank code lines and creating the interactive exercises—hands-on practice.</a:t>
-            </a:r>
-          </a:p>
-          <a:p>
-            <a:pPr marL="0" indent="0">
-              <a:buNone/>
-            </a:pPr>
-            <a:endParaRPr lang="en-US" dirty="0"/>
+            <a:pPr algn="r"/>
+            <a:r>
+              <a:rPr lang="en-GB" sz="2400" dirty="0">
+                <a:hlinkClick r:id="rId4"/>
+              </a:rPr>
+              <a:t>https://datasquad.github.io/DEE2025_coding/</a:t>
+            </a:r>
+            <a:endParaRPr lang="en-GB" sz="2400" dirty="0"/>
+          </a:p>
+          <a:p>
+            <a:pPr algn="r"/>
+            <a:endParaRPr lang="en-GB" sz="2400" dirty="0"/>
           </a:p>
         </p:txBody>
       </p:sp>
@@ -24987,6 +25014,67 @@
               <a:rPr lang="en-US" dirty="0"/>
               <a:t>Invitation to follow-up or collaborate </a:t>
             </a:r>
+          </a:p>
+        </p:txBody>
+      </p:sp>
+      <p:sp>
+        <p:nvSpPr>
+          <p:cNvPr id="4" name="TextBox 3">
+            <a:extLst>
+              <a:ext uri="{FF2B5EF4-FFF2-40B4-BE49-F238E27FC236}">
+                <a16:creationId xmlns:a16="http://schemas.microsoft.com/office/drawing/2014/main" id="{31312F3E-BAEE-90FD-7DB5-BD468F11684C}"/>
+              </a:ext>
+            </a:extLst>
+          </p:cNvPr>
+          <p:cNvSpPr txBox="1"/>
+          <p:nvPr/>
+        </p:nvSpPr>
+        <p:spPr>
+          <a:xfrm>
+            <a:off x="838200" y="4114860"/>
+            <a:ext cx="7749301" cy="2492990"/>
+          </a:xfrm>
+          <a:prstGeom prst="rect">
+            <a:avLst/>
+          </a:prstGeom>
+          <a:noFill/>
+        </p:spPr>
+        <p:txBody>
+          <a:bodyPr wrap="none" rtlCol="0">
+            <a:spAutoFit/>
+          </a:bodyPr>
+          <a:lstStyle/>
+          <a:p>
+            <a:r>
+              <a:rPr lang="en-GB" sz="4400" dirty="0"/>
+              <a:t>Further Resources</a:t>
+            </a:r>
+          </a:p>
+          <a:p>
+            <a:endParaRPr lang="en-GB" sz="2800" dirty="0"/>
+          </a:p>
+          <a:p>
+            <a:pPr marL="285750" indent="-285750">
+              <a:buFont typeface="Arial" panose="020B0604020202020204" pitchFamily="34" charset="0"/>
+              <a:buChar char="•"/>
+            </a:pPr>
+            <a:r>
+              <a:rPr lang="en-GB" sz="2800" dirty="0"/>
+              <a:t>Econometric Computing Learning Resource (ECLR)</a:t>
+            </a:r>
+            <a:br>
+              <a:rPr lang="en-GB" sz="2800" dirty="0"/>
+            </a:br>
+            <a:r>
+              <a:rPr lang="en-GB" sz="2800" dirty="0">
+                <a:hlinkClick r:id="rId2"/>
+              </a:rPr>
+              <a:t>https://datasquad.github.io/ECLR/</a:t>
+            </a:r>
+            <a:endParaRPr lang="en-GB" sz="2800" dirty="0"/>
+          </a:p>
+          <a:p>
+            <a:endParaRPr lang="en-GB" sz="2800" dirty="0"/>
           </a:p>
         </p:txBody>
       </p:sp>

--- a/DEE2025 workshop slides Becker Zhu present.pptx
+++ b/DEE2025 workshop slides Becker Zhu present.pptx
@@ -5,45 +5,46 @@
     <p:sldMasterId id="2147483648" r:id="rId1"/>
   </p:sldMasterIdLst>
   <p:notesMasterIdLst>
-    <p:notesMasterId r:id="rId38"/>
+    <p:notesMasterId r:id="rId39"/>
   </p:notesMasterIdLst>
   <p:sldIdLst>
     <p:sldId id="256" r:id="rId2"/>
-    <p:sldId id="257" r:id="rId3"/>
-    <p:sldId id="259" r:id="rId4"/>
-    <p:sldId id="305" r:id="rId5"/>
-    <p:sldId id="306" r:id="rId6"/>
-    <p:sldId id="307" r:id="rId7"/>
-    <p:sldId id="308" r:id="rId8"/>
-    <p:sldId id="309" r:id="rId9"/>
-    <p:sldId id="310" r:id="rId10"/>
-    <p:sldId id="311" r:id="rId11"/>
-    <p:sldId id="312" r:id="rId12"/>
-    <p:sldId id="313" r:id="rId13"/>
-    <p:sldId id="314" r:id="rId14"/>
-    <p:sldId id="315" r:id="rId15"/>
-    <p:sldId id="316" r:id="rId16"/>
-    <p:sldId id="317" r:id="rId17"/>
-    <p:sldId id="318" r:id="rId18"/>
-    <p:sldId id="319" r:id="rId19"/>
-    <p:sldId id="320" r:id="rId20"/>
-    <p:sldId id="321" r:id="rId21"/>
-    <p:sldId id="322" r:id="rId22"/>
-    <p:sldId id="323" r:id="rId23"/>
-    <p:sldId id="324" r:id="rId24"/>
-    <p:sldId id="326" r:id="rId25"/>
-    <p:sldId id="325" r:id="rId26"/>
-    <p:sldId id="327" r:id="rId27"/>
-    <p:sldId id="328" r:id="rId28"/>
-    <p:sldId id="274" r:id="rId29"/>
-    <p:sldId id="264" r:id="rId30"/>
-    <p:sldId id="271" r:id="rId31"/>
-    <p:sldId id="272" r:id="rId32"/>
-    <p:sldId id="275" r:id="rId33"/>
-    <p:sldId id="265" r:id="rId34"/>
-    <p:sldId id="263" r:id="rId35"/>
-    <p:sldId id="262" r:id="rId36"/>
-    <p:sldId id="285" r:id="rId37"/>
+    <p:sldId id="329" r:id="rId3"/>
+    <p:sldId id="257" r:id="rId4"/>
+    <p:sldId id="259" r:id="rId5"/>
+    <p:sldId id="305" r:id="rId6"/>
+    <p:sldId id="306" r:id="rId7"/>
+    <p:sldId id="307" r:id="rId8"/>
+    <p:sldId id="308" r:id="rId9"/>
+    <p:sldId id="309" r:id="rId10"/>
+    <p:sldId id="310" r:id="rId11"/>
+    <p:sldId id="311" r:id="rId12"/>
+    <p:sldId id="312" r:id="rId13"/>
+    <p:sldId id="313" r:id="rId14"/>
+    <p:sldId id="314" r:id="rId15"/>
+    <p:sldId id="315" r:id="rId16"/>
+    <p:sldId id="316" r:id="rId17"/>
+    <p:sldId id="317" r:id="rId18"/>
+    <p:sldId id="318" r:id="rId19"/>
+    <p:sldId id="319" r:id="rId20"/>
+    <p:sldId id="320" r:id="rId21"/>
+    <p:sldId id="321" r:id="rId22"/>
+    <p:sldId id="322" r:id="rId23"/>
+    <p:sldId id="323" r:id="rId24"/>
+    <p:sldId id="324" r:id="rId25"/>
+    <p:sldId id="326" r:id="rId26"/>
+    <p:sldId id="325" r:id="rId27"/>
+    <p:sldId id="327" r:id="rId28"/>
+    <p:sldId id="328" r:id="rId29"/>
+    <p:sldId id="274" r:id="rId30"/>
+    <p:sldId id="264" r:id="rId31"/>
+    <p:sldId id="271" r:id="rId32"/>
+    <p:sldId id="272" r:id="rId33"/>
+    <p:sldId id="275" r:id="rId34"/>
+    <p:sldId id="265" r:id="rId35"/>
+    <p:sldId id="263" r:id="rId36"/>
+    <p:sldId id="262" r:id="rId37"/>
+    <p:sldId id="285" r:id="rId38"/>
   </p:sldIdLst>
   <p:sldSz cx="12192000" cy="6858000"/>
   <p:notesSz cx="6858000" cy="9144000"/>
@@ -6554,7 +6555,7 @@
           <a:p>
             <a:fld id="{B9646C07-FEB6-A24A-825A-896B832821A6}" type="datetimeFigureOut">
               <a:rPr lang="en-US" smtClean="0"/>
-              <a:t>9/11/2025</a:t>
+              <a:t>9/12/2025</a:t>
             </a:fld>
             <a:endParaRPr lang="en-US"/>
           </a:p>
@@ -6887,7 +6888,7 @@
           <a:p>
             <a:fld id="{56688DED-9A28-EE4A-BED4-198A7A8D1A8A}" type="slidenum">
               <a:rPr lang="en-US" smtClean="0"/>
-              <a:t>19</a:t>
+              <a:t>20</a:t>
             </a:fld>
             <a:endParaRPr lang="en-US"/>
           </a:p>
@@ -6971,7 +6972,7 @@
           <a:p>
             <a:fld id="{56688DED-9A28-EE4A-BED4-198A7A8D1A8A}" type="slidenum">
               <a:rPr lang="en-US" smtClean="0"/>
-              <a:t>33</a:t>
+              <a:t>34</a:t>
             </a:fld>
             <a:endParaRPr lang="en-US"/>
           </a:p>
@@ -7055,7 +7056,7 @@
           <a:p>
             <a:fld id="{56688DED-9A28-EE4A-BED4-198A7A8D1A8A}" type="slidenum">
               <a:rPr lang="en-US" smtClean="0"/>
-              <a:t>20</a:t>
+              <a:t>21</a:t>
             </a:fld>
             <a:endParaRPr lang="en-US"/>
           </a:p>
@@ -7139,7 +7140,7 @@
           <a:p>
             <a:fld id="{56688DED-9A28-EE4A-BED4-198A7A8D1A8A}" type="slidenum">
               <a:rPr lang="en-US" smtClean="0"/>
-              <a:t>21</a:t>
+              <a:t>22</a:t>
             </a:fld>
             <a:endParaRPr lang="en-US"/>
           </a:p>
@@ -7223,7 +7224,7 @@
           <a:p>
             <a:fld id="{56688DED-9A28-EE4A-BED4-198A7A8D1A8A}" type="slidenum">
               <a:rPr lang="en-US" smtClean="0"/>
-              <a:t>22</a:t>
+              <a:t>23</a:t>
             </a:fld>
             <a:endParaRPr lang="en-US"/>
           </a:p>
@@ -7307,7 +7308,7 @@
           <a:p>
             <a:fld id="{56688DED-9A28-EE4A-BED4-198A7A8D1A8A}" type="slidenum">
               <a:rPr lang="en-US" smtClean="0"/>
-              <a:t>23</a:t>
+              <a:t>24</a:t>
             </a:fld>
             <a:endParaRPr lang="en-US"/>
           </a:p>
@@ -7391,7 +7392,7 @@
           <a:p>
             <a:fld id="{56688DED-9A28-EE4A-BED4-198A7A8D1A8A}" type="slidenum">
               <a:rPr lang="en-US" smtClean="0"/>
-              <a:t>24</a:t>
+              <a:t>25</a:t>
             </a:fld>
             <a:endParaRPr lang="en-US"/>
           </a:p>
@@ -7475,7 +7476,7 @@
           <a:p>
             <a:fld id="{56688DED-9A28-EE4A-BED4-198A7A8D1A8A}" type="slidenum">
               <a:rPr lang="en-US" smtClean="0"/>
-              <a:t>25</a:t>
+              <a:t>26</a:t>
             </a:fld>
             <a:endParaRPr lang="en-US"/>
           </a:p>
@@ -7559,7 +7560,7 @@
           <a:p>
             <a:fld id="{56688DED-9A28-EE4A-BED4-198A7A8D1A8A}" type="slidenum">
               <a:rPr lang="en-US" smtClean="0"/>
-              <a:t>26</a:t>
+              <a:t>27</a:t>
             </a:fld>
             <a:endParaRPr lang="en-US"/>
           </a:p>
@@ -7667,7 +7668,7 @@
           <a:p>
             <a:fld id="{56688DED-9A28-EE4A-BED4-198A7A8D1A8A}" type="slidenum">
               <a:rPr lang="en-US" smtClean="0"/>
-              <a:t>27</a:t>
+              <a:t>28</a:t>
             </a:fld>
             <a:endParaRPr lang="en-US"/>
           </a:p>
@@ -7835,7 +7836,7 @@
           <a:p>
             <a:fld id="{71FA5425-D0E0-484F-B15E-0A4EA02E289E}" type="datetime1">
               <a:rPr lang="en-GB" smtClean="0"/>
-              <a:t>11/09/2025</a:t>
+              <a:t>12/09/2025</a:t>
             </a:fld>
             <a:endParaRPr lang="en-US"/>
           </a:p>
@@ -8035,7 +8036,7 @@
           <a:p>
             <a:fld id="{987EFAB7-DC2F-4341-A3F4-3B259F642E64}" type="datetime1">
               <a:rPr lang="en-GB" smtClean="0"/>
-              <a:t>11/09/2025</a:t>
+              <a:t>12/09/2025</a:t>
             </a:fld>
             <a:endParaRPr lang="en-US"/>
           </a:p>
@@ -8245,7 +8246,7 @@
           <a:p>
             <a:fld id="{9A929D7A-6CF4-C549-8943-5949BE4713C0}" type="datetime1">
               <a:rPr lang="en-GB" smtClean="0"/>
-              <a:t>11/09/2025</a:t>
+              <a:t>12/09/2025</a:t>
             </a:fld>
             <a:endParaRPr lang="en-US"/>
           </a:p>
@@ -8445,7 +8446,7 @@
           <a:p>
             <a:fld id="{86CDD7E2-17AC-6446-8903-FFCACE8EEA26}" type="datetime1">
               <a:rPr lang="en-GB" smtClean="0"/>
-              <a:t>11/09/2025</a:t>
+              <a:t>12/09/2025</a:t>
             </a:fld>
             <a:endParaRPr lang="en-US"/>
           </a:p>
@@ -8721,7 +8722,7 @@
           <a:p>
             <a:fld id="{E03976D6-966A-D142-8529-9E7031701B8F}" type="datetime1">
               <a:rPr lang="en-GB" smtClean="0"/>
-              <a:t>11/09/2025</a:t>
+              <a:t>12/09/2025</a:t>
             </a:fld>
             <a:endParaRPr lang="en-US"/>
           </a:p>
@@ -8989,7 +8990,7 @@
           <a:p>
             <a:fld id="{7D51280D-8B40-964A-9FB5-9FB05CBC6AE6}" type="datetime1">
               <a:rPr lang="en-GB" smtClean="0"/>
-              <a:t>11/09/2025</a:t>
+              <a:t>12/09/2025</a:t>
             </a:fld>
             <a:endParaRPr lang="en-US"/>
           </a:p>
@@ -9404,7 +9405,7 @@
           <a:p>
             <a:fld id="{2E4D55EC-1300-934C-A307-97BF0D87F4B8}" type="datetime1">
               <a:rPr lang="en-GB" smtClean="0"/>
-              <a:t>11/09/2025</a:t>
+              <a:t>12/09/2025</a:t>
             </a:fld>
             <a:endParaRPr lang="en-US"/>
           </a:p>
@@ -9546,7 +9547,7 @@
           <a:p>
             <a:fld id="{CEDA83F1-7D91-A447-8BC1-6454E5928C32}" type="datetime1">
               <a:rPr lang="en-GB" smtClean="0"/>
-              <a:t>11/09/2025</a:t>
+              <a:t>12/09/2025</a:t>
             </a:fld>
             <a:endParaRPr lang="en-US"/>
           </a:p>
@@ -9659,7 +9660,7 @@
           <a:p>
             <a:fld id="{BB2F8029-4CC3-9447-8737-15AB747FDC2F}" type="datetime1">
               <a:rPr lang="en-GB" smtClean="0"/>
-              <a:t>11/09/2025</a:t>
+              <a:t>12/09/2025</a:t>
             </a:fld>
             <a:endParaRPr lang="en-US"/>
           </a:p>
@@ -9972,7 +9973,7 @@
           <a:p>
             <a:fld id="{C94F589B-65DF-5F41-A074-7AE6E4159B30}" type="datetime1">
               <a:rPr lang="en-GB" smtClean="0"/>
-              <a:t>11/09/2025</a:t>
+              <a:t>12/09/2025</a:t>
             </a:fld>
             <a:endParaRPr lang="en-US"/>
           </a:p>
@@ -10261,7 +10262,7 @@
           <a:p>
             <a:fld id="{5F98D526-017B-6545-BB5E-DA0E3938C22C}" type="datetime1">
               <a:rPr lang="en-GB" smtClean="0"/>
-              <a:t>11/09/2025</a:t>
+              <a:t>12/09/2025</a:t>
             </a:fld>
             <a:endParaRPr lang="en-US"/>
           </a:p>
@@ -10504,7 +10505,7 @@
           <a:p>
             <a:fld id="{6387B4AE-C3DB-F74E-B579-B56945C49C81}" type="datetime1">
               <a:rPr lang="en-GB" smtClean="0"/>
-              <a:t>11/09/2025</a:t>
+              <a:t>12/09/2025</a:t>
             </a:fld>
             <a:endParaRPr lang="en-US"/>
           </a:p>
@@ -11232,6 +11233,708 @@
             </a:r>
             <a:r>
               <a:rPr lang="en-US" altLang="zh-CN" b="1" dirty="0"/>
+              <a:t>D</a:t>
+            </a:r>
+            <a:r>
+              <a:rPr lang="en-GB" b="1" dirty="0" err="1"/>
+              <a:t>ocuments</a:t>
+            </a:r>
+            <a:endParaRPr lang="en-US" b="1" dirty="0"/>
+          </a:p>
+        </p:txBody>
+      </p:sp>
+      <p:pic>
+        <p:nvPicPr>
+          <p:cNvPr id="4" name="Picture 2">
+            <a:extLst>
+              <a:ext uri="{FF2B5EF4-FFF2-40B4-BE49-F238E27FC236}">
+                <a16:creationId xmlns:a16="http://schemas.microsoft.com/office/drawing/2014/main" id="{EC9FFF3F-CA5F-0363-3407-7D26FB2820F0}"/>
+              </a:ext>
+            </a:extLst>
+          </p:cNvPr>
+          <p:cNvPicPr>
+            <a:picLocks noChangeAspect="1" noChangeArrowheads="1"/>
+          </p:cNvPicPr>
+          <p:nvPr/>
+        </p:nvPicPr>
+        <p:blipFill>
+          <a:blip r:embed="rId2">
+            <a:extLst>
+              <a:ext uri="{28A0092B-C50C-407E-A947-70E740481C1C}">
+                <a14:useLocalDpi xmlns:a14="http://schemas.microsoft.com/office/drawing/2010/main" val="0"/>
+              </a:ext>
+            </a:extLst>
+          </a:blip>
+          <a:srcRect/>
+          <a:stretch>
+            <a:fillRect/>
+          </a:stretch>
+        </p:blipFill>
+        <p:spPr bwMode="auto">
+          <a:xfrm>
+            <a:off x="376867" y="273982"/>
+            <a:ext cx="1274292" cy="989450"/>
+          </a:xfrm>
+          <a:prstGeom prst="rect">
+            <a:avLst/>
+          </a:prstGeom>
+          <a:noFill/>
+          <a:extLst>
+            <a:ext uri="{909E8E84-426E-40DD-AFC4-6F175D3DCCD1}">
+              <a14:hiddenFill xmlns:a14="http://schemas.microsoft.com/office/drawing/2010/main">
+                <a:solidFill>
+                  <a:srgbClr val="FFFFFF"/>
+                </a:solidFill>
+              </a14:hiddenFill>
+            </a:ext>
+          </a:extLst>
+        </p:spPr>
+      </p:pic>
+      <p:pic>
+        <p:nvPicPr>
+          <p:cNvPr id="7" name="Picture 6">
+            <a:extLst>
+              <a:ext uri="{FF2B5EF4-FFF2-40B4-BE49-F238E27FC236}">
+                <a16:creationId xmlns:a16="http://schemas.microsoft.com/office/drawing/2014/main" id="{9091E60F-9C0B-16DF-3041-5429F75148AE}"/>
+              </a:ext>
+            </a:extLst>
+          </p:cNvPr>
+          <p:cNvPicPr>
+            <a:picLocks noChangeAspect="1"/>
+          </p:cNvPicPr>
+          <p:nvPr/>
+        </p:nvPicPr>
+        <p:blipFill>
+          <a:blip r:embed="rId3"/>
+          <a:stretch>
+            <a:fillRect/>
+          </a:stretch>
+        </p:blipFill>
+        <p:spPr>
+          <a:xfrm>
+            <a:off x="6242275" y="1843510"/>
+            <a:ext cx="5768752" cy="3956030"/>
+          </a:xfrm>
+          <a:prstGeom prst="rect">
+            <a:avLst/>
+          </a:prstGeom>
+        </p:spPr>
+      </p:pic>
+      <p:pic>
+        <p:nvPicPr>
+          <p:cNvPr id="8" name="Picture 7">
+            <a:extLst>
+              <a:ext uri="{FF2B5EF4-FFF2-40B4-BE49-F238E27FC236}">
+                <a16:creationId xmlns:a16="http://schemas.microsoft.com/office/drawing/2014/main" id="{52BB65C2-A8B9-0CF1-BF4C-7263478CF32B}"/>
+              </a:ext>
+            </a:extLst>
+          </p:cNvPr>
+          <p:cNvPicPr>
+            <a:picLocks noChangeAspect="1"/>
+          </p:cNvPicPr>
+          <p:nvPr/>
+        </p:nvPicPr>
+        <p:blipFill>
+          <a:blip r:embed="rId4"/>
+          <a:stretch>
+            <a:fillRect/>
+          </a:stretch>
+        </p:blipFill>
+        <p:spPr>
+          <a:xfrm>
+            <a:off x="209965" y="1746045"/>
+            <a:ext cx="5888841" cy="2144572"/>
+          </a:xfrm>
+          <a:prstGeom prst="rect">
+            <a:avLst/>
+          </a:prstGeom>
+          <a:ln w="38100">
+            <a:solidFill>
+              <a:schemeClr val="accent1"/>
+            </a:solidFill>
+          </a:ln>
+          <a:effectLst>
+            <a:outerShdw blurRad="50800" dist="38100" dir="18900000" algn="bl" rotWithShape="0">
+              <a:prstClr val="black">
+                <a:alpha val="40000"/>
+              </a:prstClr>
+            </a:outerShdw>
+          </a:effectLst>
+        </p:spPr>
+      </p:pic>
+      <p:sp>
+        <p:nvSpPr>
+          <p:cNvPr id="9" name="TextBox 8">
+            <a:extLst>
+              <a:ext uri="{FF2B5EF4-FFF2-40B4-BE49-F238E27FC236}">
+                <a16:creationId xmlns:a16="http://schemas.microsoft.com/office/drawing/2014/main" id="{37AE2F3C-9CDC-E5D2-BDE8-FE99B389D839}"/>
+              </a:ext>
+            </a:extLst>
+          </p:cNvPr>
+          <p:cNvSpPr txBox="1"/>
+          <p:nvPr/>
+        </p:nvSpPr>
+        <p:spPr>
+          <a:xfrm>
+            <a:off x="180973" y="4048638"/>
+            <a:ext cx="5899903" cy="2031325"/>
+          </a:xfrm>
+          <a:prstGeom prst="rect">
+            <a:avLst/>
+          </a:prstGeom>
+          <a:noFill/>
+          <a:ln w="41275">
+            <a:solidFill>
+              <a:schemeClr val="accent5">
+                <a:lumMod val="75000"/>
+              </a:schemeClr>
+            </a:solidFill>
+          </a:ln>
+        </p:spPr>
+        <p:txBody>
+          <a:bodyPr wrap="square" rtlCol="0">
+            <a:spAutoFit/>
+          </a:bodyPr>
+          <a:lstStyle/>
+          <a:p>
+            <a:r>
+              <a:rPr lang="en-GB" sz="1400" dirty="0">
+                <a:solidFill>
+                  <a:schemeClr val="accent1"/>
+                </a:solidFill>
+              </a:rPr>
+              <a:t>The </a:t>
+            </a:r>
+            <a:r>
+              <a:rPr lang="en-GB" sz="1400" dirty="0" err="1">
+                <a:solidFill>
+                  <a:schemeClr val="accent1"/>
+                </a:solidFill>
+              </a:rPr>
+              <a:t>Rmarkdown</a:t>
+            </a:r>
+            <a:r>
+              <a:rPr lang="en-GB" sz="1400" dirty="0">
+                <a:solidFill>
+                  <a:schemeClr val="accent1"/>
+                </a:solidFill>
+              </a:rPr>
+              <a:t> code</a:t>
+            </a:r>
+          </a:p>
+          <a:p>
+            <a:endParaRPr lang="en-GB" sz="1400" dirty="0">
+              <a:solidFill>
+                <a:schemeClr val="accent1"/>
+              </a:solidFill>
+            </a:endParaRPr>
+          </a:p>
+          <a:p>
+            <a:r>
+              <a:rPr lang="en-GB" sz="1400" dirty="0">
+                <a:solidFill>
+                  <a:schemeClr val="accent1"/>
+                </a:solidFill>
+              </a:rPr>
+              <a:t>Code is enclosed in:  </a:t>
+            </a:r>
+          </a:p>
+          <a:p>
+            <a:endParaRPr lang="en-GB" sz="1400" dirty="0">
+              <a:solidFill>
+                <a:schemeClr val="accent1"/>
+              </a:solidFill>
+            </a:endParaRPr>
+          </a:p>
+          <a:p>
+            <a:endParaRPr lang="en-GB" sz="1400" dirty="0">
+              <a:solidFill>
+                <a:schemeClr val="accent1"/>
+              </a:solidFill>
+            </a:endParaRPr>
+          </a:p>
+          <a:p>
+            <a:endParaRPr lang="en-GB" sz="1400" dirty="0">
+              <a:solidFill>
+                <a:schemeClr val="accent1"/>
+              </a:solidFill>
+            </a:endParaRPr>
+          </a:p>
+          <a:p>
+            <a:endParaRPr lang="en-GB" sz="1400" dirty="0">
+              <a:solidFill>
+                <a:schemeClr val="accent1"/>
+              </a:solidFill>
+            </a:endParaRPr>
+          </a:p>
+          <a:p>
+            <a:r>
+              <a:rPr lang="en-GB" sz="1400" dirty="0">
+                <a:solidFill>
+                  <a:schemeClr val="accent1"/>
+                </a:solidFill>
+              </a:rPr>
+              <a:t>You can control whether code shows, executes, messages and errors are shown and how code output is shown</a:t>
+            </a:r>
+          </a:p>
+        </p:txBody>
+      </p:sp>
+      <p:sp>
+        <p:nvSpPr>
+          <p:cNvPr id="11" name="TextBox 10">
+            <a:extLst>
+              <a:ext uri="{FF2B5EF4-FFF2-40B4-BE49-F238E27FC236}">
+                <a16:creationId xmlns:a16="http://schemas.microsoft.com/office/drawing/2014/main" id="{730B6B9F-6B77-A751-8CEA-878FF495656D}"/>
+              </a:ext>
+            </a:extLst>
+          </p:cNvPr>
+          <p:cNvSpPr txBox="1"/>
+          <p:nvPr/>
+        </p:nvSpPr>
+        <p:spPr>
+          <a:xfrm>
+            <a:off x="1311581" y="6457890"/>
+            <a:ext cx="9697848" cy="400110"/>
+          </a:xfrm>
+          <a:prstGeom prst="rect">
+            <a:avLst/>
+          </a:prstGeom>
+          <a:noFill/>
+        </p:spPr>
+        <p:txBody>
+          <a:bodyPr wrap="none" rtlCol="0">
+            <a:spAutoFit/>
+          </a:bodyPr>
+          <a:lstStyle/>
+          <a:p>
+            <a:r>
+              <a:rPr lang="en-GB" sz="2000" dirty="0"/>
+              <a:t>To get from </a:t>
+            </a:r>
+            <a:r>
+              <a:rPr lang="en-GB" sz="2000" dirty="0" err="1">
+                <a:solidFill>
+                  <a:schemeClr val="accent1"/>
+                </a:solidFill>
+              </a:rPr>
+              <a:t>Rmarkdown</a:t>
+            </a:r>
+            <a:r>
+              <a:rPr lang="en-GB" sz="2000" dirty="0"/>
+              <a:t> to </a:t>
+            </a:r>
+            <a:r>
+              <a:rPr lang="en-US" altLang="zh-CN" sz="2000" dirty="0">
+                <a:solidFill>
+                  <a:schemeClr val="accent6"/>
+                </a:solidFill>
+              </a:rPr>
+              <a:t>HTML</a:t>
+            </a:r>
+            <a:r>
+              <a:rPr lang="en-GB" sz="2000" dirty="0"/>
+              <a:t> you need to render or knit the file (done through </a:t>
+            </a:r>
+            <a:r>
+              <a:rPr lang="en-GB" sz="2000" dirty="0" err="1"/>
+              <a:t>Rstudio</a:t>
+            </a:r>
+            <a:r>
+              <a:rPr lang="en-GB" sz="2000" dirty="0"/>
+              <a:t>)</a:t>
+            </a:r>
+          </a:p>
+        </p:txBody>
+      </p:sp>
+      <p:sp>
+        <p:nvSpPr>
+          <p:cNvPr id="17" name="TextBox 16">
+            <a:extLst>
+              <a:ext uri="{FF2B5EF4-FFF2-40B4-BE49-F238E27FC236}">
+                <a16:creationId xmlns:a16="http://schemas.microsoft.com/office/drawing/2014/main" id="{9DA25D01-6F6C-867A-37ED-2428519693D8}"/>
+              </a:ext>
+            </a:extLst>
+          </p:cNvPr>
+          <p:cNvSpPr txBox="1"/>
+          <p:nvPr/>
+        </p:nvSpPr>
+        <p:spPr>
+          <a:xfrm>
+            <a:off x="2230710" y="1316044"/>
+            <a:ext cx="1847350" cy="369332"/>
+          </a:xfrm>
+          <a:prstGeom prst="rect">
+            <a:avLst/>
+          </a:prstGeom>
+          <a:noFill/>
+        </p:spPr>
+        <p:txBody>
+          <a:bodyPr wrap="square" rtlCol="0">
+            <a:spAutoFit/>
+          </a:bodyPr>
+          <a:lstStyle/>
+          <a:p>
+            <a:pPr algn="ctr"/>
+            <a:r>
+              <a:rPr lang="en-US" altLang="zh-CN" b="1" dirty="0">
+                <a:solidFill>
+                  <a:srgbClr val="FF0000"/>
+                </a:solidFill>
+              </a:rPr>
+              <a:t>R</a:t>
+            </a:r>
+            <a:r>
+              <a:rPr lang="zh-CN" altLang="en-US" b="1" dirty="0">
+                <a:solidFill>
+                  <a:srgbClr val="FF0000"/>
+                </a:solidFill>
+              </a:rPr>
+              <a:t> </a:t>
+            </a:r>
+            <a:r>
+              <a:rPr lang="en-US" altLang="zh-CN" b="1" dirty="0">
+                <a:solidFill>
+                  <a:srgbClr val="FF0000"/>
+                </a:solidFill>
+              </a:rPr>
+              <a:t>Markdown</a:t>
+            </a:r>
+            <a:r>
+              <a:rPr lang="zh-CN" altLang="en-US" b="1" dirty="0">
+                <a:solidFill>
+                  <a:srgbClr val="FF0000"/>
+                </a:solidFill>
+              </a:rPr>
+              <a:t> </a:t>
+            </a:r>
+            <a:r>
+              <a:rPr lang="en-US" altLang="zh-CN" b="1" dirty="0">
+                <a:solidFill>
+                  <a:srgbClr val="FF0000"/>
+                </a:solidFill>
+              </a:rPr>
+              <a:t>File</a:t>
+            </a:r>
+            <a:endParaRPr lang="en-US" b="1" dirty="0">
+              <a:solidFill>
+                <a:srgbClr val="FF0000"/>
+              </a:solidFill>
+            </a:endParaRPr>
+          </a:p>
+        </p:txBody>
+      </p:sp>
+      <p:sp>
+        <p:nvSpPr>
+          <p:cNvPr id="18" name="TextBox 17">
+            <a:extLst>
+              <a:ext uri="{FF2B5EF4-FFF2-40B4-BE49-F238E27FC236}">
+                <a16:creationId xmlns:a16="http://schemas.microsoft.com/office/drawing/2014/main" id="{31B31621-0536-99B9-5404-271F6BCE6A78}"/>
+              </a:ext>
+            </a:extLst>
+          </p:cNvPr>
+          <p:cNvSpPr txBox="1"/>
+          <p:nvPr/>
+        </p:nvSpPr>
+        <p:spPr>
+          <a:xfrm>
+            <a:off x="8131872" y="1319487"/>
+            <a:ext cx="1719072" cy="369332"/>
+          </a:xfrm>
+          <a:prstGeom prst="rect">
+            <a:avLst/>
+          </a:prstGeom>
+          <a:noFill/>
+        </p:spPr>
+        <p:txBody>
+          <a:bodyPr wrap="square" rtlCol="0">
+            <a:spAutoFit/>
+          </a:bodyPr>
+          <a:lstStyle/>
+          <a:p>
+            <a:pPr algn="ctr"/>
+            <a:r>
+              <a:rPr lang="en-US" b="1" dirty="0">
+                <a:solidFill>
+                  <a:srgbClr val="FF0000"/>
+                </a:solidFill>
+              </a:rPr>
+              <a:t>HTML</a:t>
+            </a:r>
+            <a:r>
+              <a:rPr lang="zh-CN" altLang="en-US" b="1" dirty="0">
+                <a:solidFill>
+                  <a:srgbClr val="FF0000"/>
+                </a:solidFill>
+              </a:rPr>
+              <a:t> </a:t>
+            </a:r>
+            <a:r>
+              <a:rPr lang="en-US" altLang="zh-CN" b="1" dirty="0">
+                <a:solidFill>
+                  <a:srgbClr val="FF0000"/>
+                </a:solidFill>
+              </a:rPr>
+              <a:t>Output</a:t>
+            </a:r>
+            <a:endParaRPr lang="en-US" b="1" dirty="0">
+              <a:solidFill>
+                <a:srgbClr val="FF0000"/>
+              </a:solidFill>
+            </a:endParaRPr>
+          </a:p>
+        </p:txBody>
+      </p:sp>
+      <p:sp>
+        <p:nvSpPr>
+          <p:cNvPr id="20" name="Circular Arrow 19">
+            <a:extLst>
+              <a:ext uri="{FF2B5EF4-FFF2-40B4-BE49-F238E27FC236}">
+                <a16:creationId xmlns:a16="http://schemas.microsoft.com/office/drawing/2014/main" id="{4A7A3065-F4AB-F0D4-FE8B-EA86E6C1C0C2}"/>
+              </a:ext>
+            </a:extLst>
+          </p:cNvPr>
+          <p:cNvSpPr/>
+          <p:nvPr/>
+        </p:nvSpPr>
+        <p:spPr>
+          <a:xfrm flipV="1">
+            <a:off x="5458855" y="5476363"/>
+            <a:ext cx="1274290" cy="1060263"/>
+          </a:xfrm>
+          <a:prstGeom prst="circularArrow">
+            <a:avLst/>
+          </a:prstGeom>
+          <a:solidFill>
+            <a:schemeClr val="tx1"/>
+          </a:solidFill>
+        </p:spPr>
+        <p:style>
+          <a:lnRef idx="2">
+            <a:schemeClr val="accent1">
+              <a:shade val="50000"/>
+            </a:schemeClr>
+          </a:lnRef>
+          <a:fillRef idx="1">
+            <a:schemeClr val="accent1"/>
+          </a:fillRef>
+          <a:effectRef idx="0">
+            <a:schemeClr val="accent1"/>
+          </a:effectRef>
+          <a:fontRef idx="minor">
+            <a:schemeClr val="lt1"/>
+          </a:fontRef>
+        </p:style>
+        <p:txBody>
+          <a:bodyPr rtlCol="0" anchor="ctr"/>
+          <a:lstStyle/>
+          <a:p>
+            <a:pPr algn="ctr"/>
+            <a:endParaRPr lang="en-US" dirty="0">
+              <a:solidFill>
+                <a:schemeClr val="tx1"/>
+              </a:solidFill>
+            </a:endParaRPr>
+          </a:p>
+        </p:txBody>
+      </p:sp>
+      <p:cxnSp>
+        <p:nvCxnSpPr>
+          <p:cNvPr id="21" name="Straight Arrow Connector 20">
+            <a:extLst>
+              <a:ext uri="{FF2B5EF4-FFF2-40B4-BE49-F238E27FC236}">
+                <a16:creationId xmlns:a16="http://schemas.microsoft.com/office/drawing/2014/main" id="{650D0569-B7C1-2FC8-736D-24F146DE28A5}"/>
+              </a:ext>
+            </a:extLst>
+          </p:cNvPr>
+          <p:cNvCxnSpPr>
+            <a:cxnSpLocks/>
+          </p:cNvCxnSpPr>
+          <p:nvPr/>
+        </p:nvCxnSpPr>
+        <p:spPr>
+          <a:xfrm>
+            <a:off x="2379252" y="3743864"/>
+            <a:ext cx="0" cy="304774"/>
+          </a:xfrm>
+          <a:prstGeom prst="straightConnector1">
+            <a:avLst/>
+          </a:prstGeom>
+          <a:ln w="38100">
+            <a:tailEnd type="triangle"/>
+          </a:ln>
+        </p:spPr>
+        <p:style>
+          <a:lnRef idx="1">
+            <a:schemeClr val="accent1"/>
+          </a:lnRef>
+          <a:fillRef idx="0">
+            <a:schemeClr val="accent1"/>
+          </a:fillRef>
+          <a:effectRef idx="0">
+            <a:schemeClr val="accent1"/>
+          </a:effectRef>
+          <a:fontRef idx="minor">
+            <a:schemeClr val="tx1"/>
+          </a:fontRef>
+        </p:style>
+      </p:cxnSp>
+      <p:sp>
+        <p:nvSpPr>
+          <p:cNvPr id="24" name="TextBox 23">
+            <a:extLst>
+              <a:ext uri="{FF2B5EF4-FFF2-40B4-BE49-F238E27FC236}">
+                <a16:creationId xmlns:a16="http://schemas.microsoft.com/office/drawing/2014/main" id="{F455E578-9AD2-9BA5-84BF-48C165D89E44}"/>
+              </a:ext>
+            </a:extLst>
+          </p:cNvPr>
+          <p:cNvSpPr txBox="1"/>
+          <p:nvPr/>
+        </p:nvSpPr>
+        <p:spPr>
+          <a:xfrm>
+            <a:off x="209965" y="4736242"/>
+            <a:ext cx="5802646" cy="646331"/>
+          </a:xfrm>
+          <a:prstGeom prst="rect">
+            <a:avLst/>
+          </a:prstGeom>
+          <a:solidFill>
+            <a:schemeClr val="bg1">
+              <a:lumMod val="85000"/>
+            </a:schemeClr>
+          </a:solidFill>
+        </p:spPr>
+        <p:txBody>
+          <a:bodyPr wrap="square" rtlCol="0">
+            <a:spAutoFit/>
+          </a:bodyPr>
+          <a:lstStyle/>
+          <a:p>
+            <a:r>
+              <a:rPr lang="en-GB" sz="1200" dirty="0">
+                <a:solidFill>
+                  <a:schemeClr val="accent1"/>
+                </a:solidFill>
+                <a:latin typeface="Courier New" panose="02070309020205020404" pitchFamily="49" charset="0"/>
+                <a:cs typeface="Courier New" panose="02070309020205020404" pitchFamily="49" charset="0"/>
+              </a:rPr>
+              <a:t>```{r}</a:t>
+            </a:r>
+          </a:p>
+          <a:p>
+            <a:r>
+              <a:rPr lang="en-US" altLang="zh-CN" sz="1200" dirty="0">
+                <a:solidFill>
+                  <a:schemeClr val="accent1"/>
+                </a:solidFill>
+                <a:latin typeface="Courier New" panose="02070309020205020404" pitchFamily="49" charset="0"/>
+                <a:cs typeface="Courier New" panose="02070309020205020404" pitchFamily="49" charset="0"/>
+              </a:rPr>
+              <a:t>YOUR</a:t>
+            </a:r>
+            <a:r>
+              <a:rPr lang="zh-CN" altLang="en-US" sz="1200" dirty="0">
+                <a:solidFill>
+                  <a:schemeClr val="accent1"/>
+                </a:solidFill>
+                <a:latin typeface="Courier New" panose="02070309020205020404" pitchFamily="49" charset="0"/>
+                <a:cs typeface="Courier New" panose="02070309020205020404" pitchFamily="49" charset="0"/>
+              </a:rPr>
+              <a:t> </a:t>
+            </a:r>
+            <a:r>
+              <a:rPr lang="en-GB" sz="1200" dirty="0">
+                <a:solidFill>
+                  <a:schemeClr val="accent1"/>
+                </a:solidFill>
+                <a:latin typeface="Courier New" panose="02070309020205020404" pitchFamily="49" charset="0"/>
+                <a:cs typeface="Courier New" panose="02070309020205020404" pitchFamily="49" charset="0"/>
+              </a:rPr>
+              <a:t>CODE GOES HERE</a:t>
+            </a:r>
+          </a:p>
+          <a:p>
+            <a:r>
+              <a:rPr lang="en-GB" sz="1200" dirty="0">
+                <a:solidFill>
+                  <a:schemeClr val="accent1"/>
+                </a:solidFill>
+                <a:latin typeface="Courier New" panose="02070309020205020404" pitchFamily="49" charset="0"/>
+                <a:cs typeface="Courier New" panose="02070309020205020404" pitchFamily="49" charset="0"/>
+              </a:rPr>
+              <a:t>```</a:t>
+            </a:r>
+          </a:p>
+        </p:txBody>
+      </p:sp>
+    </p:spTree>
+    <p:extLst>
+      <p:ext uri="{BB962C8B-B14F-4D97-AF65-F5344CB8AC3E}">
+        <p14:creationId xmlns:p14="http://schemas.microsoft.com/office/powerpoint/2010/main" val="3454899495"/>
+      </p:ext>
+    </p:extLst>
+  </p:cSld>
+  <p:clrMapOvr>
+    <a:masterClrMapping/>
+  </p:clrMapOvr>
+</p:sld>
+</file>
+
+<file path=ppt/slides/slide11.xml><?xml version="1.0" encoding="utf-8"?>
+<p:sld xmlns:a="http://schemas.openxmlformats.org/drawingml/2006/main" xmlns:r="http://schemas.openxmlformats.org/officeDocument/2006/relationships" xmlns:p="http://schemas.openxmlformats.org/presentationml/2006/main">
+  <p:cSld>
+    <p:spTree>
+      <p:nvGrpSpPr>
+        <p:cNvPr id="1" name=""/>
+        <p:cNvGrpSpPr/>
+        <p:nvPr/>
+      </p:nvGrpSpPr>
+      <p:grpSpPr>
+        <a:xfrm>
+          <a:off x="0" y="0"/>
+          <a:ext cx="0" cy="0"/>
+          <a:chOff x="0" y="0"/>
+          <a:chExt cx="0" cy="0"/>
+        </a:xfrm>
+      </p:grpSpPr>
+      <p:sp>
+        <p:nvSpPr>
+          <p:cNvPr id="2" name="Title 1">
+            <a:extLst>
+              <a:ext uri="{FF2B5EF4-FFF2-40B4-BE49-F238E27FC236}">
+                <a16:creationId xmlns:a16="http://schemas.microsoft.com/office/drawing/2014/main" id="{697A6EAD-477B-C87E-9908-4D6CFD5CA6F2}"/>
+              </a:ext>
+            </a:extLst>
+          </p:cNvPr>
+          <p:cNvSpPr>
+            <a:spLocks noGrp="1"/>
+          </p:cNvSpPr>
+          <p:nvPr>
+            <p:ph type="title"/>
+          </p:nvPr>
+        </p:nvSpPr>
+        <p:spPr>
+          <a:xfrm>
+            <a:off x="1837426" y="365125"/>
+            <a:ext cx="9516374" cy="741299"/>
+          </a:xfrm>
+        </p:spPr>
+        <p:txBody>
+          <a:bodyPr>
+            <a:normAutofit/>
+          </a:bodyPr>
+          <a:lstStyle/>
+          <a:p>
+            <a:r>
+              <a:rPr lang="en-GB" b="1" dirty="0" err="1"/>
+              <a:t>Rmarkdown</a:t>
+            </a:r>
+            <a:r>
+              <a:rPr lang="en-GB" b="1" dirty="0"/>
+              <a:t> </a:t>
+            </a:r>
+            <a:r>
+              <a:rPr lang="en-US" altLang="zh-CN" b="1" dirty="0"/>
               <a:t>I</a:t>
             </a:r>
             <a:r>
@@ -11730,7 +12433,7 @@
 </p:sld>
 </file>
 
-<file path=ppt/slides/slide11.xml><?xml version="1.0" encoding="utf-8"?>
+<file path=ppt/slides/slide12.xml><?xml version="1.0" encoding="utf-8"?>
 <p:sld xmlns:a="http://schemas.openxmlformats.org/drawingml/2006/main" xmlns:r="http://schemas.openxmlformats.org/officeDocument/2006/relationships" xmlns:p="http://schemas.openxmlformats.org/presentationml/2006/main">
   <p:cSld>
     <p:spTree>
@@ -12627,7 +13330,7 @@
 </p:sld>
 </file>
 
-<file path=ppt/slides/slide12.xml><?xml version="1.0" encoding="utf-8"?>
+<file path=ppt/slides/slide13.xml><?xml version="1.0" encoding="utf-8"?>
 <p:sld xmlns:a="http://schemas.openxmlformats.org/drawingml/2006/main" xmlns:r="http://schemas.openxmlformats.org/officeDocument/2006/relationships" xmlns:p="http://schemas.openxmlformats.org/presentationml/2006/main">
   <p:cSld>
     <p:spTree>
@@ -13141,7 +13844,7 @@
 </p:sld>
 </file>
 
-<file path=ppt/slides/slide13.xml><?xml version="1.0" encoding="utf-8"?>
+<file path=ppt/slides/slide14.xml><?xml version="1.0" encoding="utf-8"?>
 <p:sld xmlns:a="http://schemas.openxmlformats.org/drawingml/2006/main" xmlns:r="http://schemas.openxmlformats.org/officeDocument/2006/relationships" xmlns:p="http://schemas.openxmlformats.org/presentationml/2006/main">
   <p:cSld>
     <p:spTree>
@@ -14073,7 +14776,7 @@
 </p:sld>
 </file>
 
-<file path=ppt/slides/slide14.xml><?xml version="1.0" encoding="utf-8"?>
+<file path=ppt/slides/slide15.xml><?xml version="1.0" encoding="utf-8"?>
 <p:sld xmlns:a="http://schemas.openxmlformats.org/drawingml/2006/main" xmlns:r="http://schemas.openxmlformats.org/officeDocument/2006/relationships" xmlns:p="http://schemas.openxmlformats.org/presentationml/2006/main">
   <p:cSld>
     <p:spTree>
@@ -14444,7 +15147,7 @@
 </p:sld>
 </file>
 
-<file path=ppt/slides/slide15.xml><?xml version="1.0" encoding="utf-8"?>
+<file path=ppt/slides/slide16.xml><?xml version="1.0" encoding="utf-8"?>
 <p:sld xmlns:a="http://schemas.openxmlformats.org/drawingml/2006/main" xmlns:r="http://schemas.openxmlformats.org/officeDocument/2006/relationships" xmlns:p="http://schemas.openxmlformats.org/presentationml/2006/main">
   <p:cSld>
     <p:spTree>
@@ -15259,7 +15962,7 @@
 </p:sld>
 </file>
 
-<file path=ppt/slides/slide16.xml><?xml version="1.0" encoding="utf-8"?>
+<file path=ppt/slides/slide17.xml><?xml version="1.0" encoding="utf-8"?>
 <p:sld xmlns:a="http://schemas.openxmlformats.org/drawingml/2006/main" xmlns:r="http://schemas.openxmlformats.org/officeDocument/2006/relationships" xmlns:p="http://schemas.openxmlformats.org/presentationml/2006/main">
   <p:cSld>
     <p:spTree>
@@ -15932,7 +16635,7 @@
 </p:sld>
 </file>
 
-<file path=ppt/slides/slide17.xml><?xml version="1.0" encoding="utf-8"?>
+<file path=ppt/slides/slide18.xml><?xml version="1.0" encoding="utf-8"?>
 <p:sld xmlns:a="http://schemas.openxmlformats.org/drawingml/2006/main" xmlns:r="http://schemas.openxmlformats.org/officeDocument/2006/relationships" xmlns:p="http://schemas.openxmlformats.org/presentationml/2006/main">
   <p:cSld>
     <p:spTree>
@@ -16404,7 +17107,7 @@
 </p:sld>
 </file>
 
-<file path=ppt/slides/slide18.xml><?xml version="1.0" encoding="utf-8"?>
+<file path=ppt/slides/slide19.xml><?xml version="1.0" encoding="utf-8"?>
 <p:sld xmlns:a="http://schemas.openxmlformats.org/drawingml/2006/main" xmlns:r="http://schemas.openxmlformats.org/officeDocument/2006/relationships" xmlns:p="http://schemas.openxmlformats.org/presentationml/2006/main">
   <p:cSld>
     <p:spTree>
@@ -16989,7 +17692,77 @@
 </p:sld>
 </file>
 
-<file path=ppt/slides/slide19.xml><?xml version="1.0" encoding="utf-8"?>
+<file path=ppt/slides/slide2.xml><?xml version="1.0" encoding="utf-8"?>
+<p:sld xmlns:a="http://schemas.openxmlformats.org/drawingml/2006/main" xmlns:r="http://schemas.openxmlformats.org/officeDocument/2006/relationships" xmlns:p="http://schemas.openxmlformats.org/presentationml/2006/main">
+  <p:cSld>
+    <p:bg>
+      <p:bgPr>
+        <a:solidFill>
+          <a:schemeClr val="bg1"/>
+        </a:solidFill>
+        <a:effectLst/>
+      </p:bgPr>
+    </p:bg>
+    <p:spTree>
+      <p:nvGrpSpPr>
+        <p:cNvPr id="1" name=""/>
+        <p:cNvGrpSpPr/>
+        <p:nvPr/>
+      </p:nvGrpSpPr>
+      <p:grpSpPr>
+        <a:xfrm>
+          <a:off x="0" y="0"/>
+          <a:ext cx="0" cy="0"/>
+          <a:chOff x="0" y="0"/>
+          <a:chExt cx="0" cy="0"/>
+        </a:xfrm>
+      </p:grpSpPr>
+      <p:pic>
+        <p:nvPicPr>
+          <p:cNvPr id="4" name="Content Placeholder 3" descr="A qr code on a white background&#10;&#10;AI-generated content may be incorrect.">
+            <a:extLst>
+              <a:ext uri="{FF2B5EF4-FFF2-40B4-BE49-F238E27FC236}">
+                <a16:creationId xmlns:a16="http://schemas.microsoft.com/office/drawing/2014/main" id="{F8E06876-0411-4A17-1D86-C7E9BCFF4AC5}"/>
+              </a:ext>
+            </a:extLst>
+          </p:cNvPr>
+          <p:cNvPicPr>
+            <a:picLocks noGrp="1" noChangeAspect="1"/>
+          </p:cNvPicPr>
+          <p:nvPr>
+            <p:ph idx="1"/>
+          </p:nvPr>
+        </p:nvPicPr>
+        <p:blipFill>
+          <a:blip r:embed="rId2"/>
+          <a:stretch>
+            <a:fillRect/>
+          </a:stretch>
+        </p:blipFill>
+        <p:spPr>
+          <a:xfrm>
+            <a:off x="3944175" y="643466"/>
+            <a:ext cx="4303649" cy="5571067"/>
+          </a:xfrm>
+          <a:prstGeom prst="rect">
+            <a:avLst/>
+          </a:prstGeom>
+        </p:spPr>
+      </p:pic>
+    </p:spTree>
+    <p:extLst>
+      <p:ext uri="{BB962C8B-B14F-4D97-AF65-F5344CB8AC3E}">
+        <p14:creationId xmlns:p14="http://schemas.microsoft.com/office/powerpoint/2010/main" val="2313440868"/>
+      </p:ext>
+    </p:extLst>
+  </p:cSld>
+  <p:clrMapOvr>
+    <a:masterClrMapping/>
+  </p:clrMapOvr>
+</p:sld>
+</file>
+
+<file path=ppt/slides/slide20.xml><?xml version="1.0" encoding="utf-8"?>
 <p:sld xmlns:a="http://schemas.openxmlformats.org/drawingml/2006/main" xmlns:r="http://schemas.openxmlformats.org/officeDocument/2006/relationships" xmlns:p="http://schemas.openxmlformats.org/presentationml/2006/main">
   <p:cSld>
     <p:spTree>
@@ -18002,273 +18775,7 @@
 </p:sld>
 </file>
 
-<file path=ppt/slides/slide2.xml><?xml version="1.0" encoding="utf-8"?>
-<p:sld xmlns:a="http://schemas.openxmlformats.org/drawingml/2006/main" xmlns:r="http://schemas.openxmlformats.org/officeDocument/2006/relationships" xmlns:p="http://schemas.openxmlformats.org/presentationml/2006/main">
-  <p:cSld>
-    <p:spTree>
-      <p:nvGrpSpPr>
-        <p:cNvPr id="1" name=""/>
-        <p:cNvGrpSpPr/>
-        <p:nvPr/>
-      </p:nvGrpSpPr>
-      <p:grpSpPr>
-        <a:xfrm>
-          <a:off x="0" y="0"/>
-          <a:ext cx="0" cy="0"/>
-          <a:chOff x="0" y="0"/>
-          <a:chExt cx="0" cy="0"/>
-        </a:xfrm>
-      </p:grpSpPr>
-      <p:sp>
-        <p:nvSpPr>
-          <p:cNvPr id="2" name="Title 1">
-            <a:extLst>
-              <a:ext uri="{FF2B5EF4-FFF2-40B4-BE49-F238E27FC236}">
-                <a16:creationId xmlns:a16="http://schemas.microsoft.com/office/drawing/2014/main" id="{7363A03B-0EA6-8E63-4C77-632DD73EB77A}"/>
-              </a:ext>
-            </a:extLst>
-          </p:cNvPr>
-          <p:cNvSpPr>
-            <a:spLocks noGrp="1"/>
-          </p:cNvSpPr>
-          <p:nvPr>
-            <p:ph type="title"/>
-          </p:nvPr>
-        </p:nvSpPr>
-        <p:spPr/>
-        <p:txBody>
-          <a:bodyPr/>
-          <a:lstStyle/>
-          <a:p>
-            <a:r>
-              <a:rPr lang="en-US" b="1" dirty="0"/>
-              <a:t>Agenda</a:t>
-            </a:r>
-          </a:p>
-        </p:txBody>
-      </p:sp>
-      <p:sp>
-        <p:nvSpPr>
-          <p:cNvPr id="3" name="Content Placeholder 2">
-            <a:extLst>
-              <a:ext uri="{FF2B5EF4-FFF2-40B4-BE49-F238E27FC236}">
-                <a16:creationId xmlns:a16="http://schemas.microsoft.com/office/drawing/2014/main" id="{B62D52C0-51E1-3807-B7DD-EE1A670E827A}"/>
-              </a:ext>
-            </a:extLst>
-          </p:cNvPr>
-          <p:cNvSpPr>
-            <a:spLocks noGrp="1"/>
-          </p:cNvSpPr>
-          <p:nvPr>
-            <p:ph idx="1"/>
-          </p:nvPr>
-        </p:nvSpPr>
-        <p:spPr/>
-        <p:txBody>
-          <a:bodyPr/>
-          <a:lstStyle/>
-          <a:p>
-            <a:r>
-              <a:rPr lang="en-US" altLang="zh-CN" dirty="0"/>
-              <a:t>Workshop</a:t>
-            </a:r>
-            <a:r>
-              <a:rPr lang="zh-CN" altLang="en-US" dirty="0"/>
-              <a:t> </a:t>
-            </a:r>
-            <a:r>
-              <a:rPr lang="en-US" altLang="zh-CN" dirty="0"/>
-              <a:t>Objectives</a:t>
-            </a:r>
-          </a:p>
-          <a:p>
-            <a:r>
-              <a:rPr lang="en-GB" dirty="0"/>
-              <a:t>Why This Workshop?</a:t>
-            </a:r>
-          </a:p>
-          <a:p>
-            <a:r>
-              <a:rPr lang="en-GB" dirty="0"/>
-              <a:t>“Getting your hands dirty” </a:t>
-            </a:r>
-            <a:r>
-              <a:rPr lang="en-US" altLang="zh-CN" dirty="0"/>
-              <a:t>I</a:t>
-            </a:r>
-            <a:r>
-              <a:rPr lang="en-GB" dirty="0" err="1"/>
-              <a:t>nstruction</a:t>
-            </a:r>
-            <a:endParaRPr lang="en-GB" dirty="0">
-              <a:solidFill>
-                <a:srgbClr val="FF0000"/>
-              </a:solidFill>
-            </a:endParaRPr>
-          </a:p>
-          <a:p>
-            <a:r>
-              <a:rPr lang="en-GB" dirty="0"/>
-              <a:t>Interactive Worksheet</a:t>
-            </a:r>
-          </a:p>
-          <a:p>
-            <a:r>
-              <a:rPr lang="en-GB" dirty="0"/>
-              <a:t>Evaluation Evidence (Case Study: Aston, Manchester)</a:t>
-            </a:r>
-          </a:p>
-          <a:p>
-            <a:r>
-              <a:rPr lang="en-GB" dirty="0"/>
-              <a:t>Group Reflection </a:t>
-            </a:r>
-          </a:p>
-          <a:p>
-            <a:r>
-              <a:rPr lang="en-GB" dirty="0"/>
-              <a:t>Wrap-up &amp; Takeaways</a:t>
-            </a:r>
-          </a:p>
-          <a:p>
-            <a:endParaRPr lang="en-GB" dirty="0"/>
-          </a:p>
-          <a:p>
-            <a:endParaRPr lang="en-GB" dirty="0"/>
-          </a:p>
-          <a:p>
-            <a:endParaRPr lang="en-GB" dirty="0"/>
-          </a:p>
-          <a:p>
-            <a:endParaRPr lang="en-GB" dirty="0"/>
-          </a:p>
-          <a:p>
-            <a:endParaRPr lang="en-US" dirty="0"/>
-          </a:p>
-        </p:txBody>
-      </p:sp>
-      <p:sp>
-        <p:nvSpPr>
-          <p:cNvPr id="4" name="TextBox 3">
-            <a:extLst>
-              <a:ext uri="{FF2B5EF4-FFF2-40B4-BE49-F238E27FC236}">
-                <a16:creationId xmlns:a16="http://schemas.microsoft.com/office/drawing/2014/main" id="{E7D82AE5-8C8C-A166-4DD7-FA20B67785FB}"/>
-              </a:ext>
-            </a:extLst>
-          </p:cNvPr>
-          <p:cNvSpPr txBox="1"/>
-          <p:nvPr/>
-        </p:nvSpPr>
-        <p:spPr>
-          <a:xfrm>
-            <a:off x="7975892" y="2161978"/>
-            <a:ext cx="3959354" cy="830997"/>
-          </a:xfrm>
-          <a:prstGeom prst="rect">
-            <a:avLst/>
-          </a:prstGeom>
-          <a:noFill/>
-        </p:spPr>
-        <p:txBody>
-          <a:bodyPr wrap="none" rtlCol="0">
-            <a:spAutoFit/>
-          </a:bodyPr>
-          <a:lstStyle/>
-          <a:p>
-            <a:r>
-              <a:rPr lang="en-GB" sz="2400" dirty="0" err="1"/>
-              <a:t>Github</a:t>
-            </a:r>
-            <a:r>
-              <a:rPr lang="en-GB" sz="2400" dirty="0"/>
-              <a:t> page for this workshop</a:t>
-            </a:r>
-          </a:p>
-          <a:p>
-            <a:endParaRPr lang="en-GB" sz="2400" dirty="0"/>
-          </a:p>
-        </p:txBody>
-      </p:sp>
-      <p:pic>
-        <p:nvPicPr>
-          <p:cNvPr id="5" name="Picture 4" descr="A qr code on a white background&#10;&#10;AI-generated content may be incorrect.">
-            <a:extLst>
-              <a:ext uri="{FF2B5EF4-FFF2-40B4-BE49-F238E27FC236}">
-                <a16:creationId xmlns:a16="http://schemas.microsoft.com/office/drawing/2014/main" id="{B973EA03-842C-28F1-BC4C-C2320BAEDB7D}"/>
-              </a:ext>
-            </a:extLst>
-          </p:cNvPr>
-          <p:cNvPicPr>
-            <a:picLocks noChangeAspect="1"/>
-          </p:cNvPicPr>
-          <p:nvPr/>
-        </p:nvPicPr>
-        <p:blipFill>
-          <a:blip r:embed="rId2"/>
-          <a:stretch>
-            <a:fillRect/>
-          </a:stretch>
-        </p:blipFill>
-        <p:spPr>
-          <a:xfrm>
-            <a:off x="9717280" y="2807208"/>
-            <a:ext cx="2122430" cy="2743200"/>
-          </a:xfrm>
-          <a:prstGeom prst="rect">
-            <a:avLst/>
-          </a:prstGeom>
-        </p:spPr>
-      </p:pic>
-      <p:sp>
-        <p:nvSpPr>
-          <p:cNvPr id="6" name="TextBox 5">
-            <a:extLst>
-              <a:ext uri="{FF2B5EF4-FFF2-40B4-BE49-F238E27FC236}">
-                <a16:creationId xmlns:a16="http://schemas.microsoft.com/office/drawing/2014/main" id="{83B48401-69AD-7E0B-24F0-6A7616C26D00}"/>
-              </a:ext>
-            </a:extLst>
-          </p:cNvPr>
-          <p:cNvSpPr txBox="1"/>
-          <p:nvPr/>
-        </p:nvSpPr>
-        <p:spPr>
-          <a:xfrm>
-            <a:off x="5840770" y="6009871"/>
-            <a:ext cx="6094476" cy="461665"/>
-          </a:xfrm>
-          <a:prstGeom prst="rect">
-            <a:avLst/>
-          </a:prstGeom>
-          <a:noFill/>
-        </p:spPr>
-        <p:txBody>
-          <a:bodyPr wrap="square">
-            <a:spAutoFit/>
-          </a:bodyPr>
-          <a:lstStyle/>
-          <a:p>
-            <a:pPr algn="r"/>
-            <a:r>
-              <a:rPr lang="en-GB" sz="2400" dirty="0"/>
-              <a:t>https://datasquad.github.io/DEE2025_coding/</a:t>
-            </a:r>
-          </a:p>
-        </p:txBody>
-      </p:sp>
-    </p:spTree>
-    <p:extLst>
-      <p:ext uri="{BB962C8B-B14F-4D97-AF65-F5344CB8AC3E}">
-        <p14:creationId xmlns:p14="http://schemas.microsoft.com/office/powerpoint/2010/main" val="3670361938"/>
-      </p:ext>
-    </p:extLst>
-  </p:cSld>
-  <p:clrMapOvr>
-    <a:masterClrMapping/>
-  </p:clrMapOvr>
-</p:sld>
-</file>
-
-<file path=ppt/slides/slide20.xml><?xml version="1.0" encoding="utf-8"?>
+<file path=ppt/slides/slide21.xml><?xml version="1.0" encoding="utf-8"?>
 <p:sld xmlns:a="http://schemas.openxmlformats.org/drawingml/2006/main" xmlns:r="http://schemas.openxmlformats.org/officeDocument/2006/relationships" xmlns:p="http://schemas.openxmlformats.org/presentationml/2006/main">
   <p:cSld>
     <p:spTree>
@@ -18823,7 +19330,7 @@
 </p:sld>
 </file>
 
-<file path=ppt/slides/slide21.xml><?xml version="1.0" encoding="utf-8"?>
+<file path=ppt/slides/slide22.xml><?xml version="1.0" encoding="utf-8"?>
 <p:sld xmlns:a="http://schemas.openxmlformats.org/drawingml/2006/main" xmlns:r="http://schemas.openxmlformats.org/officeDocument/2006/relationships" xmlns:p="http://schemas.openxmlformats.org/presentationml/2006/main">
   <p:cSld>
     <p:spTree>
@@ -19250,7 +19757,7 @@
 </p:sld>
 </file>
 
-<file path=ppt/slides/slide22.xml><?xml version="1.0" encoding="utf-8"?>
+<file path=ppt/slides/slide23.xml><?xml version="1.0" encoding="utf-8"?>
 <p:sld xmlns:a="http://schemas.openxmlformats.org/drawingml/2006/main" xmlns:r="http://schemas.openxmlformats.org/officeDocument/2006/relationships" xmlns:p="http://schemas.openxmlformats.org/presentationml/2006/main">
   <p:cSld>
     <p:spTree>
@@ -19850,7 +20357,7 @@
 </p:sld>
 </file>
 
-<file path=ppt/slides/slide23.xml><?xml version="1.0" encoding="utf-8"?>
+<file path=ppt/slides/slide24.xml><?xml version="1.0" encoding="utf-8"?>
 <p:sld xmlns:a="http://schemas.openxmlformats.org/drawingml/2006/main" xmlns:r="http://schemas.openxmlformats.org/officeDocument/2006/relationships" xmlns:p="http://schemas.openxmlformats.org/presentationml/2006/main">
   <p:cSld>
     <p:spTree>
@@ -20813,7 +21320,7 @@
 </p:sld>
 </file>
 
-<file path=ppt/slides/slide24.xml><?xml version="1.0" encoding="utf-8"?>
+<file path=ppt/slides/slide25.xml><?xml version="1.0" encoding="utf-8"?>
 <p:sld xmlns:a="http://schemas.openxmlformats.org/drawingml/2006/main" xmlns:r="http://schemas.openxmlformats.org/officeDocument/2006/relationships" xmlns:p="http://schemas.openxmlformats.org/presentationml/2006/main">
   <p:cSld>
     <p:spTree>
@@ -21194,7 +21701,7 @@
 </p:sld>
 </file>
 
-<file path=ppt/slides/slide25.xml><?xml version="1.0" encoding="utf-8"?>
+<file path=ppt/slides/slide26.xml><?xml version="1.0" encoding="utf-8"?>
 <p:sld xmlns:a="http://schemas.openxmlformats.org/drawingml/2006/main" xmlns:r="http://schemas.openxmlformats.org/officeDocument/2006/relationships" xmlns:p="http://schemas.openxmlformats.org/presentationml/2006/main">
   <p:cSld>
     <p:spTree>
@@ -21402,7 +21909,7 @@
 </p:sld>
 </file>
 
-<file path=ppt/slides/slide26.xml><?xml version="1.0" encoding="utf-8"?>
+<file path=ppt/slides/slide27.xml><?xml version="1.0" encoding="utf-8"?>
 <p:sld xmlns:a="http://schemas.openxmlformats.org/drawingml/2006/main" xmlns:r="http://schemas.openxmlformats.org/officeDocument/2006/relationships" xmlns:p="http://schemas.openxmlformats.org/presentationml/2006/main">
   <p:cSld>
     <p:spTree>
@@ -21774,7 +22281,7 @@
 </p:sld>
 </file>
 
-<file path=ppt/slides/slide27.xml><?xml version="1.0" encoding="utf-8"?>
+<file path=ppt/slides/slide28.xml><?xml version="1.0" encoding="utf-8"?>
 <p:sld xmlns:a="http://schemas.openxmlformats.org/drawingml/2006/main" xmlns:r="http://schemas.openxmlformats.org/officeDocument/2006/relationships" xmlns:p="http://schemas.openxmlformats.org/presentationml/2006/main">
   <p:cSld>
     <p:spTree>
@@ -21988,7 +22495,7 @@
 </p:sld>
 </file>
 
-<file path=ppt/slides/slide28.xml><?xml version="1.0" encoding="utf-8"?>
+<file path=ppt/slides/slide29.xml><?xml version="1.0" encoding="utf-8"?>
 <p:sld xmlns:a="http://schemas.openxmlformats.org/drawingml/2006/main" xmlns:r="http://schemas.openxmlformats.org/officeDocument/2006/relationships" xmlns:p="http://schemas.openxmlformats.org/presentationml/2006/main">
   <p:cSld>
     <p:spTree>
@@ -22214,7 +22721,280 @@
 </p:sld>
 </file>
 
-<file path=ppt/slides/slide29.xml><?xml version="1.0" encoding="utf-8"?>
+<file path=ppt/slides/slide3.xml><?xml version="1.0" encoding="utf-8"?>
+<p:sld xmlns:a="http://schemas.openxmlformats.org/drawingml/2006/main" xmlns:r="http://schemas.openxmlformats.org/officeDocument/2006/relationships" xmlns:p="http://schemas.openxmlformats.org/presentationml/2006/main">
+  <p:cSld>
+    <p:spTree>
+      <p:nvGrpSpPr>
+        <p:cNvPr id="1" name=""/>
+        <p:cNvGrpSpPr/>
+        <p:nvPr/>
+      </p:nvGrpSpPr>
+      <p:grpSpPr>
+        <a:xfrm>
+          <a:off x="0" y="0"/>
+          <a:ext cx="0" cy="0"/>
+          <a:chOff x="0" y="0"/>
+          <a:chExt cx="0" cy="0"/>
+        </a:xfrm>
+      </p:grpSpPr>
+      <p:sp>
+        <p:nvSpPr>
+          <p:cNvPr id="2" name="Title 1">
+            <a:extLst>
+              <a:ext uri="{FF2B5EF4-FFF2-40B4-BE49-F238E27FC236}">
+                <a16:creationId xmlns:a16="http://schemas.microsoft.com/office/drawing/2014/main" id="{7363A03B-0EA6-8E63-4C77-632DD73EB77A}"/>
+              </a:ext>
+            </a:extLst>
+          </p:cNvPr>
+          <p:cNvSpPr>
+            <a:spLocks noGrp="1"/>
+          </p:cNvSpPr>
+          <p:nvPr>
+            <p:ph type="title"/>
+          </p:nvPr>
+        </p:nvSpPr>
+        <p:spPr/>
+        <p:txBody>
+          <a:bodyPr/>
+          <a:lstStyle/>
+          <a:p>
+            <a:r>
+              <a:rPr lang="en-US" b="1" dirty="0"/>
+              <a:t>Agenda</a:t>
+            </a:r>
+          </a:p>
+        </p:txBody>
+      </p:sp>
+      <p:sp>
+        <p:nvSpPr>
+          <p:cNvPr id="3" name="Content Placeholder 2">
+            <a:extLst>
+              <a:ext uri="{FF2B5EF4-FFF2-40B4-BE49-F238E27FC236}">
+                <a16:creationId xmlns:a16="http://schemas.microsoft.com/office/drawing/2014/main" id="{B62D52C0-51E1-3807-B7DD-EE1A670E827A}"/>
+              </a:ext>
+            </a:extLst>
+          </p:cNvPr>
+          <p:cNvSpPr>
+            <a:spLocks noGrp="1"/>
+          </p:cNvSpPr>
+          <p:nvPr>
+            <p:ph idx="1"/>
+          </p:nvPr>
+        </p:nvSpPr>
+        <p:spPr/>
+        <p:txBody>
+          <a:bodyPr/>
+          <a:lstStyle/>
+          <a:p>
+            <a:r>
+              <a:rPr lang="en-US" altLang="zh-CN" dirty="0"/>
+              <a:t>Workshop</a:t>
+            </a:r>
+            <a:r>
+              <a:rPr lang="zh-CN" altLang="en-US" dirty="0"/>
+              <a:t> </a:t>
+            </a:r>
+            <a:r>
+              <a:rPr lang="en-US" altLang="zh-CN" dirty="0"/>
+              <a:t>Objectives</a:t>
+            </a:r>
+          </a:p>
+          <a:p>
+            <a:r>
+              <a:rPr lang="en-GB" dirty="0"/>
+              <a:t>Why This Workshop?</a:t>
+            </a:r>
+          </a:p>
+          <a:p>
+            <a:r>
+              <a:rPr lang="en-GB" dirty="0"/>
+              <a:t>“Getting your hands dirty” </a:t>
+            </a:r>
+            <a:r>
+              <a:rPr lang="en-US" altLang="zh-CN" dirty="0"/>
+              <a:t>I</a:t>
+            </a:r>
+            <a:r>
+              <a:rPr lang="en-GB" dirty="0" err="1"/>
+              <a:t>nstruction</a:t>
+            </a:r>
+            <a:endParaRPr lang="en-GB" dirty="0">
+              <a:solidFill>
+                <a:srgbClr val="FF0000"/>
+              </a:solidFill>
+            </a:endParaRPr>
+          </a:p>
+          <a:p>
+            <a:r>
+              <a:rPr lang="en-GB" dirty="0"/>
+              <a:t>Interactive Worksheet</a:t>
+            </a:r>
+          </a:p>
+          <a:p>
+            <a:r>
+              <a:rPr lang="en-GB" dirty="0"/>
+              <a:t>Evaluation Evidence (Case Study: Aston, Manchester)</a:t>
+            </a:r>
+          </a:p>
+          <a:p>
+            <a:r>
+              <a:rPr lang="en-GB" dirty="0"/>
+              <a:t>Group Reflection </a:t>
+            </a:r>
+          </a:p>
+          <a:p>
+            <a:r>
+              <a:rPr lang="en-GB" dirty="0"/>
+              <a:t>Wrap-up &amp; Takeaways</a:t>
+            </a:r>
+          </a:p>
+          <a:p>
+            <a:endParaRPr lang="en-GB" dirty="0"/>
+          </a:p>
+          <a:p>
+            <a:endParaRPr lang="en-GB" dirty="0"/>
+          </a:p>
+          <a:p>
+            <a:endParaRPr lang="en-GB" dirty="0"/>
+          </a:p>
+          <a:p>
+            <a:endParaRPr lang="en-GB" dirty="0"/>
+          </a:p>
+          <a:p>
+            <a:endParaRPr lang="en-US" dirty="0"/>
+          </a:p>
+        </p:txBody>
+      </p:sp>
+      <p:sp>
+        <p:nvSpPr>
+          <p:cNvPr id="4" name="TextBox 3">
+            <a:extLst>
+              <a:ext uri="{FF2B5EF4-FFF2-40B4-BE49-F238E27FC236}">
+                <a16:creationId xmlns:a16="http://schemas.microsoft.com/office/drawing/2014/main" id="{E7D82AE5-8C8C-A166-4DD7-FA20B67785FB}"/>
+              </a:ext>
+            </a:extLst>
+          </p:cNvPr>
+          <p:cNvSpPr txBox="1"/>
+          <p:nvPr/>
+        </p:nvSpPr>
+        <p:spPr>
+          <a:xfrm>
+            <a:off x="7975892" y="2161978"/>
+            <a:ext cx="3959354" cy="830997"/>
+          </a:xfrm>
+          <a:prstGeom prst="rect">
+            <a:avLst/>
+          </a:prstGeom>
+          <a:noFill/>
+        </p:spPr>
+        <p:txBody>
+          <a:bodyPr wrap="none" rtlCol="0">
+            <a:spAutoFit/>
+          </a:bodyPr>
+          <a:lstStyle/>
+          <a:p>
+            <a:r>
+              <a:rPr lang="en-GB" sz="2400" dirty="0" err="1"/>
+              <a:t>Github</a:t>
+            </a:r>
+            <a:r>
+              <a:rPr lang="en-GB" sz="2400" dirty="0"/>
+              <a:t> page for this workshop</a:t>
+            </a:r>
+          </a:p>
+          <a:p>
+            <a:endParaRPr lang="en-GB" sz="2400" dirty="0"/>
+          </a:p>
+        </p:txBody>
+      </p:sp>
+      <p:pic>
+        <p:nvPicPr>
+          <p:cNvPr id="5" name="Picture 4" descr="A qr code on a white background&#10;&#10;AI-generated content may be incorrect.">
+            <a:extLst>
+              <a:ext uri="{FF2B5EF4-FFF2-40B4-BE49-F238E27FC236}">
+                <a16:creationId xmlns:a16="http://schemas.microsoft.com/office/drawing/2014/main" id="{B973EA03-842C-28F1-BC4C-C2320BAEDB7D}"/>
+              </a:ext>
+            </a:extLst>
+          </p:cNvPr>
+          <p:cNvPicPr>
+            <a:picLocks noChangeAspect="1"/>
+          </p:cNvPicPr>
+          <p:nvPr/>
+        </p:nvPicPr>
+        <p:blipFill>
+          <a:blip r:embed="rId2"/>
+          <a:stretch>
+            <a:fillRect/>
+          </a:stretch>
+        </p:blipFill>
+        <p:spPr>
+          <a:xfrm>
+            <a:off x="9717280" y="2807208"/>
+            <a:ext cx="2122430" cy="2743200"/>
+          </a:xfrm>
+          <a:prstGeom prst="rect">
+            <a:avLst/>
+          </a:prstGeom>
+        </p:spPr>
+      </p:pic>
+      <p:sp>
+        <p:nvSpPr>
+          <p:cNvPr id="6" name="TextBox 5">
+            <a:extLst>
+              <a:ext uri="{FF2B5EF4-FFF2-40B4-BE49-F238E27FC236}">
+                <a16:creationId xmlns:a16="http://schemas.microsoft.com/office/drawing/2014/main" id="{83B48401-69AD-7E0B-24F0-6A7616C26D00}"/>
+              </a:ext>
+            </a:extLst>
+          </p:cNvPr>
+          <p:cNvSpPr txBox="1"/>
+          <p:nvPr/>
+        </p:nvSpPr>
+        <p:spPr>
+          <a:xfrm>
+            <a:off x="5840770" y="6009871"/>
+            <a:ext cx="6094476" cy="830997"/>
+          </a:xfrm>
+          <a:prstGeom prst="rect">
+            <a:avLst/>
+          </a:prstGeom>
+          <a:noFill/>
+        </p:spPr>
+        <p:txBody>
+          <a:bodyPr wrap="square">
+            <a:spAutoFit/>
+          </a:bodyPr>
+          <a:lstStyle/>
+          <a:p>
+            <a:pPr algn="r"/>
+            <a:r>
+              <a:rPr lang="en-GB" sz="2400" dirty="0">
+                <a:hlinkClick r:id="rId3"/>
+              </a:rPr>
+              <a:t>https://datasquad.github.io/DEE2025_coding/</a:t>
+            </a:r>
+            <a:endParaRPr lang="en-GB" sz="2400" dirty="0"/>
+          </a:p>
+          <a:p>
+            <a:pPr algn="r"/>
+            <a:endParaRPr lang="en-GB" sz="2400" dirty="0"/>
+          </a:p>
+        </p:txBody>
+      </p:sp>
+    </p:spTree>
+    <p:extLst>
+      <p:ext uri="{BB962C8B-B14F-4D97-AF65-F5344CB8AC3E}">
+        <p14:creationId xmlns:p14="http://schemas.microsoft.com/office/powerpoint/2010/main" val="3670361938"/>
+      </p:ext>
+    </p:extLst>
+  </p:cSld>
+  <p:clrMapOvr>
+    <a:masterClrMapping/>
+  </p:clrMapOvr>
+</p:sld>
+</file>
+
+<file path=ppt/slides/slide30.xml><?xml version="1.0" encoding="utf-8"?>
 <p:sld xmlns:a="http://schemas.openxmlformats.org/drawingml/2006/main" xmlns:r="http://schemas.openxmlformats.org/officeDocument/2006/relationships" xmlns:p="http://schemas.openxmlformats.org/presentationml/2006/main">
   <p:cSld>
     <p:spTree>
@@ -22709,397 +23489,7 @@
 </p:sld>
 </file>
 
-<file path=ppt/slides/slide3.xml><?xml version="1.0" encoding="utf-8"?>
-<p:sld xmlns:a="http://schemas.openxmlformats.org/drawingml/2006/main" xmlns:r="http://schemas.openxmlformats.org/officeDocument/2006/relationships" xmlns:p="http://schemas.openxmlformats.org/presentationml/2006/main">
-  <p:cSld>
-    <p:spTree>
-      <p:nvGrpSpPr>
-        <p:cNvPr id="1" name=""/>
-        <p:cNvGrpSpPr/>
-        <p:nvPr/>
-      </p:nvGrpSpPr>
-      <p:grpSpPr>
-        <a:xfrm>
-          <a:off x="0" y="0"/>
-          <a:ext cx="0" cy="0"/>
-          <a:chOff x="0" y="0"/>
-          <a:chExt cx="0" cy="0"/>
-        </a:xfrm>
-      </p:grpSpPr>
-      <p:sp>
-        <p:nvSpPr>
-          <p:cNvPr id="2" name="Title 1">
-            <a:extLst>
-              <a:ext uri="{FF2B5EF4-FFF2-40B4-BE49-F238E27FC236}">
-                <a16:creationId xmlns:a16="http://schemas.microsoft.com/office/drawing/2014/main" id="{697A6EAD-477B-C87E-9908-4D6CFD5CA6F2}"/>
-              </a:ext>
-            </a:extLst>
-          </p:cNvPr>
-          <p:cNvSpPr>
-            <a:spLocks noGrp="1"/>
-          </p:cNvSpPr>
-          <p:nvPr>
-            <p:ph type="title"/>
-          </p:nvPr>
-        </p:nvSpPr>
-        <p:spPr>
-          <a:xfrm>
-            <a:off x="250995" y="267669"/>
-            <a:ext cx="10515600" cy="741299"/>
-          </a:xfrm>
-        </p:spPr>
-        <p:txBody>
-          <a:bodyPr>
-            <a:normAutofit/>
-          </a:bodyPr>
-          <a:lstStyle/>
-          <a:p>
-            <a:r>
-              <a:rPr lang="en-GB" b="1" dirty="0"/>
-              <a:t>Why This Workshop?</a:t>
-            </a:r>
-            <a:endParaRPr lang="en-US" b="1" dirty="0"/>
-          </a:p>
-        </p:txBody>
-      </p:sp>
-      <p:sp>
-        <p:nvSpPr>
-          <p:cNvPr id="4" name="Content Placeholder 2">
-            <a:extLst>
-              <a:ext uri="{FF2B5EF4-FFF2-40B4-BE49-F238E27FC236}">
-                <a16:creationId xmlns:a16="http://schemas.microsoft.com/office/drawing/2014/main" id="{217CAB55-A58C-FF2E-68C7-88796844A9EF}"/>
-              </a:ext>
-            </a:extLst>
-          </p:cNvPr>
-          <p:cNvSpPr>
-            <a:spLocks noGrp="1"/>
-          </p:cNvSpPr>
-          <p:nvPr>
-            <p:ph idx="1"/>
-          </p:nvPr>
-        </p:nvSpPr>
-        <p:spPr>
-          <a:xfrm>
-            <a:off x="250995" y="1136437"/>
-            <a:ext cx="8827971" cy="5094999"/>
-          </a:xfrm>
-        </p:spPr>
-        <p:txBody>
-          <a:bodyPr>
-            <a:noAutofit/>
-          </a:bodyPr>
-          <a:lstStyle/>
-          <a:p>
-            <a:r>
-              <a:rPr lang="en-US" dirty="0"/>
-              <a:t>Steep learning curve for beginners, particularly in grasping coding logic and syntax.</a:t>
-            </a:r>
-          </a:p>
-          <a:p>
-            <a:r>
-              <a:rPr lang="en-US" dirty="0"/>
-              <a:t>Need to foster independent coding and problem-solving skills.</a:t>
-            </a:r>
-          </a:p>
-          <a:p>
-            <a:r>
-              <a:rPr lang="en-US" dirty="0"/>
-              <a:t>How to adjust instruction in the presence of AI?</a:t>
-            </a:r>
-          </a:p>
-          <a:p>
-            <a:pPr marL="0" indent="0">
-              <a:buNone/>
-            </a:pPr>
-            <a:r>
-              <a:rPr lang="en-GB" dirty="0"/>
-              <a:t>Shift focus:</a:t>
-            </a:r>
-          </a:p>
-          <a:p>
-            <a:pPr>
-              <a:buFont typeface="Arial" panose="020B0604020202020204" pitchFamily="34" charset="0"/>
-              <a:buChar char="•"/>
-            </a:pPr>
-            <a:r>
-              <a:rPr lang="en-GB" dirty="0"/>
-              <a:t>From memorising syntax → to understanding coding processes</a:t>
-            </a:r>
-          </a:p>
-          <a:p>
-            <a:pPr>
-              <a:buFont typeface="Arial" panose="020B0604020202020204" pitchFamily="34" charset="0"/>
-              <a:buChar char="•"/>
-            </a:pPr>
-            <a:r>
-              <a:rPr lang="en-GB" dirty="0"/>
-              <a:t>From “knowing the right code” → to engaging actively with coding challenges</a:t>
-            </a:r>
-          </a:p>
-          <a:p>
-            <a:pPr>
-              <a:buFont typeface="Arial" panose="020B0604020202020204" pitchFamily="34" charset="0"/>
-              <a:buChar char="•"/>
-            </a:pPr>
-            <a:r>
-              <a:rPr lang="en-GB" dirty="0"/>
-              <a:t>From avoiding resources → to using web searches and LLMs productively</a:t>
-            </a:r>
-          </a:p>
-          <a:p>
-            <a:endParaRPr lang="en-US" dirty="0"/>
-          </a:p>
-          <a:p>
-            <a:endParaRPr lang="en-US" dirty="0"/>
-          </a:p>
-        </p:txBody>
-      </p:sp>
-      <p:pic>
-        <p:nvPicPr>
-          <p:cNvPr id="5" name="Picture 4" descr="A drawing of a person climbing a curve&#10;&#10;Description automatically generated">
-            <a:extLst>
-              <a:ext uri="{FF2B5EF4-FFF2-40B4-BE49-F238E27FC236}">
-                <a16:creationId xmlns:a16="http://schemas.microsoft.com/office/drawing/2014/main" id="{12AF4DF6-9D25-32E0-8DC1-72D8CC1BC6EA}"/>
-              </a:ext>
-            </a:extLst>
-          </p:cNvPr>
-          <p:cNvPicPr>
-            <a:picLocks noChangeAspect="1"/>
-          </p:cNvPicPr>
-          <p:nvPr/>
-        </p:nvPicPr>
-        <p:blipFill>
-          <a:blip r:embed="rId2"/>
-          <a:stretch>
-            <a:fillRect/>
-          </a:stretch>
-        </p:blipFill>
-        <p:spPr>
-          <a:xfrm>
-            <a:off x="9265511" y="897968"/>
-            <a:ext cx="2516177" cy="2531032"/>
-          </a:xfrm>
-          <a:prstGeom prst="rect">
-            <a:avLst/>
-          </a:prstGeom>
-        </p:spPr>
-      </p:pic>
-      <p:pic>
-        <p:nvPicPr>
-          <p:cNvPr id="6" name="Picture 5" descr="A cartoon character with a speech bubble&#10;&#10;Description automatically generated">
-            <a:extLst>
-              <a:ext uri="{FF2B5EF4-FFF2-40B4-BE49-F238E27FC236}">
-                <a16:creationId xmlns:a16="http://schemas.microsoft.com/office/drawing/2014/main" id="{6948FF73-F3CF-190D-727C-9A58148A4CE3}"/>
-              </a:ext>
-            </a:extLst>
-          </p:cNvPr>
-          <p:cNvPicPr>
-            <a:picLocks noChangeAspect="1"/>
-          </p:cNvPicPr>
-          <p:nvPr/>
-        </p:nvPicPr>
-        <p:blipFill>
-          <a:blip r:embed="rId3"/>
-          <a:stretch>
-            <a:fillRect/>
-          </a:stretch>
-        </p:blipFill>
-        <p:spPr>
-          <a:xfrm>
-            <a:off x="9202446" y="3683937"/>
-            <a:ext cx="2642306" cy="2531032"/>
-          </a:xfrm>
-          <a:prstGeom prst="rect">
-            <a:avLst/>
-          </a:prstGeom>
-        </p:spPr>
-      </p:pic>
-    </p:spTree>
-    <p:extLst>
-      <p:ext uri="{BB962C8B-B14F-4D97-AF65-F5344CB8AC3E}">
-        <p14:creationId xmlns:p14="http://schemas.microsoft.com/office/powerpoint/2010/main" val="4022208039"/>
-      </p:ext>
-    </p:extLst>
-  </p:cSld>
-  <p:clrMapOvr>
-    <a:masterClrMapping/>
-  </p:clrMapOvr>
-  <p:timing>
-    <p:tnLst>
-      <p:par>
-        <p:cTn id="1" dur="indefinite" restart="never" nodeType="tmRoot">
-          <p:childTnLst>
-            <p:seq concurrent="1" nextAc="seek">
-              <p:cTn id="2" dur="indefinite" nodeType="mainSeq">
-                <p:childTnLst>
-                  <p:par>
-                    <p:cTn id="3" fill="hold">
-                      <p:stCondLst>
-                        <p:cond delay="indefinite"/>
-                      </p:stCondLst>
-                      <p:childTnLst>
-                        <p:par>
-                          <p:cTn id="4" fill="hold">
-                            <p:stCondLst>
-                              <p:cond delay="0"/>
-                            </p:stCondLst>
-                            <p:childTnLst>
-                              <p:par>
-                                <p:cTn id="5" presetID="1" presetClass="entr" presetSubtype="0" fill="hold" nodeType="clickEffect">
-                                  <p:stCondLst>
-                                    <p:cond delay="0"/>
-                                  </p:stCondLst>
-                                  <p:childTnLst>
-                                    <p:set>
-                                      <p:cBhvr>
-                                        <p:cTn id="6" dur="1" fill="hold">
-                                          <p:stCondLst>
-                                            <p:cond delay="0"/>
-                                          </p:stCondLst>
-                                        </p:cTn>
-                                        <p:tgtEl>
-                                          <p:spTgt spid="4">
-                                            <p:txEl>
-                                              <p:pRg st="3" end="3"/>
-                                            </p:txEl>
-                                          </p:spTgt>
-                                        </p:tgtEl>
-                                        <p:attrNameLst>
-                                          <p:attrName>style.visibility</p:attrName>
-                                        </p:attrNameLst>
-                                      </p:cBhvr>
-                                      <p:to>
-                                        <p:strVal val="visible"/>
-                                      </p:to>
-                                    </p:set>
-                                  </p:childTnLst>
-                                </p:cTn>
-                              </p:par>
-                              <p:par>
-                                <p:cTn id="7" presetID="1" presetClass="entr" presetSubtype="0" fill="hold" nodeType="withEffect">
-                                  <p:stCondLst>
-                                    <p:cond delay="0"/>
-                                  </p:stCondLst>
-                                  <p:childTnLst>
-                                    <p:set>
-                                      <p:cBhvr>
-                                        <p:cTn id="8" dur="1" fill="hold">
-                                          <p:stCondLst>
-                                            <p:cond delay="0"/>
-                                          </p:stCondLst>
-                                        </p:cTn>
-                                        <p:tgtEl>
-                                          <p:spTgt spid="4">
-                                            <p:txEl>
-                                              <p:pRg st="4" end="4"/>
-                                            </p:txEl>
-                                          </p:spTgt>
-                                        </p:tgtEl>
-                                        <p:attrNameLst>
-                                          <p:attrName>style.visibility</p:attrName>
-                                        </p:attrNameLst>
-                                      </p:cBhvr>
-                                      <p:to>
-                                        <p:strVal val="visible"/>
-                                      </p:to>
-                                    </p:set>
-                                  </p:childTnLst>
-                                </p:cTn>
-                              </p:par>
-                              <p:par>
-                                <p:cTn id="9" presetID="1" presetClass="entr" presetSubtype="0" fill="hold" nodeType="withEffect">
-                                  <p:stCondLst>
-                                    <p:cond delay="0"/>
-                                  </p:stCondLst>
-                                  <p:childTnLst>
-                                    <p:set>
-                                      <p:cBhvr>
-                                        <p:cTn id="10" dur="1" fill="hold">
-                                          <p:stCondLst>
-                                            <p:cond delay="0"/>
-                                          </p:stCondLst>
-                                        </p:cTn>
-                                        <p:tgtEl>
-                                          <p:spTgt spid="4">
-                                            <p:txEl>
-                                              <p:pRg st="5" end="5"/>
-                                            </p:txEl>
-                                          </p:spTgt>
-                                        </p:tgtEl>
-                                        <p:attrNameLst>
-                                          <p:attrName>style.visibility</p:attrName>
-                                        </p:attrNameLst>
-                                      </p:cBhvr>
-                                      <p:to>
-                                        <p:strVal val="visible"/>
-                                      </p:to>
-                                    </p:set>
-                                  </p:childTnLst>
-                                </p:cTn>
-                              </p:par>
-                              <p:par>
-                                <p:cTn id="11" presetID="1" presetClass="entr" presetSubtype="0" fill="hold" nodeType="withEffect">
-                                  <p:stCondLst>
-                                    <p:cond delay="0"/>
-                                  </p:stCondLst>
-                                  <p:childTnLst>
-                                    <p:set>
-                                      <p:cBhvr>
-                                        <p:cTn id="12" dur="1" fill="hold">
-                                          <p:stCondLst>
-                                            <p:cond delay="0"/>
-                                          </p:stCondLst>
-                                        </p:cTn>
-                                        <p:tgtEl>
-                                          <p:spTgt spid="4">
-                                            <p:txEl>
-                                              <p:pRg st="6" end="6"/>
-                                            </p:txEl>
-                                          </p:spTgt>
-                                        </p:tgtEl>
-                                        <p:attrNameLst>
-                                          <p:attrName>style.visibility</p:attrName>
-                                        </p:attrNameLst>
-                                      </p:cBhvr>
-                                      <p:to>
-                                        <p:strVal val="visible"/>
-                                      </p:to>
-                                    </p:set>
-                                  </p:childTnLst>
-                                </p:cTn>
-                              </p:par>
-                            </p:childTnLst>
-                          </p:cTn>
-                        </p:par>
-                      </p:childTnLst>
-                    </p:cTn>
-                  </p:par>
-                </p:childTnLst>
-              </p:cTn>
-              <p:prevCondLst>
-                <p:cond evt="onPrev" delay="0">
-                  <p:tgtEl>
-                    <p:sldTgt/>
-                  </p:tgtEl>
-                </p:cond>
-              </p:prevCondLst>
-              <p:nextCondLst>
-                <p:cond evt="onNext" delay="0">
-                  <p:tgtEl>
-                    <p:sldTgt/>
-                  </p:tgtEl>
-                </p:cond>
-              </p:nextCondLst>
-            </p:seq>
-          </p:childTnLst>
-        </p:cTn>
-      </p:par>
-    </p:tnLst>
-  </p:timing>
-</p:sld>
-</file>
-
-<file path=ppt/slides/slide30.xml><?xml version="1.0" encoding="utf-8"?>
+<file path=ppt/slides/slide31.xml><?xml version="1.0" encoding="utf-8"?>
 <p:sld xmlns:a="http://schemas.openxmlformats.org/drawingml/2006/main" xmlns:r="http://schemas.openxmlformats.org/officeDocument/2006/relationships" xmlns:p="http://schemas.openxmlformats.org/presentationml/2006/main">
   <p:cSld>
     <p:spTree>
@@ -23631,7 +24021,7 @@
 </p:sld>
 </file>
 
-<file path=ppt/slides/slide31.xml><?xml version="1.0" encoding="utf-8"?>
+<file path=ppt/slides/slide32.xml><?xml version="1.0" encoding="utf-8"?>
 <p:sld xmlns:a="http://schemas.openxmlformats.org/drawingml/2006/main" xmlns:r="http://schemas.openxmlformats.org/officeDocument/2006/relationships" xmlns:p="http://schemas.openxmlformats.org/presentationml/2006/main">
   <p:cSld>
     <p:spTree>
@@ -24134,7 +24524,7 @@
 </p:sld>
 </file>
 
-<file path=ppt/slides/slide32.xml><?xml version="1.0" encoding="utf-8"?>
+<file path=ppt/slides/slide33.xml><?xml version="1.0" encoding="utf-8"?>
 <p:sld xmlns:a="http://schemas.openxmlformats.org/drawingml/2006/main" xmlns:r="http://schemas.openxmlformats.org/officeDocument/2006/relationships" xmlns:p="http://schemas.openxmlformats.org/presentationml/2006/main">
   <p:cSld>
     <p:spTree>
@@ -24660,181 +25050,6 @@
 </p:sld>
 </file>
 
-<file path=ppt/slides/slide33.xml><?xml version="1.0" encoding="utf-8"?>
-<p:sld xmlns:a="http://schemas.openxmlformats.org/drawingml/2006/main" xmlns:r="http://schemas.openxmlformats.org/officeDocument/2006/relationships" xmlns:p="http://schemas.openxmlformats.org/presentationml/2006/main">
-  <p:cSld>
-    <p:spTree>
-      <p:nvGrpSpPr>
-        <p:cNvPr id="1" name=""/>
-        <p:cNvGrpSpPr/>
-        <p:nvPr/>
-      </p:nvGrpSpPr>
-      <p:grpSpPr>
-        <a:xfrm>
-          <a:off x="0" y="0"/>
-          <a:ext cx="0" cy="0"/>
-          <a:chOff x="0" y="0"/>
-          <a:chExt cx="0" cy="0"/>
-        </a:xfrm>
-      </p:grpSpPr>
-      <p:sp>
-        <p:nvSpPr>
-          <p:cNvPr id="2" name="Title 1">
-            <a:extLst>
-              <a:ext uri="{FF2B5EF4-FFF2-40B4-BE49-F238E27FC236}">
-                <a16:creationId xmlns:a16="http://schemas.microsoft.com/office/drawing/2014/main" id="{697A6EAD-477B-C87E-9908-4D6CFD5CA6F2}"/>
-              </a:ext>
-            </a:extLst>
-          </p:cNvPr>
-          <p:cNvSpPr>
-            <a:spLocks noGrp="1"/>
-          </p:cNvSpPr>
-          <p:nvPr>
-            <p:ph type="title"/>
-          </p:nvPr>
-        </p:nvSpPr>
-        <p:spPr/>
-        <p:txBody>
-          <a:bodyPr/>
-          <a:lstStyle/>
-          <a:p>
-            <a:r>
-              <a:rPr lang="en-US" b="1" dirty="0"/>
-              <a:t>Complete </a:t>
-            </a:r>
-            <a:r>
-              <a:rPr lang="en-US" b="1" dirty="0" err="1"/>
-              <a:t>Workthrough</a:t>
-            </a:r>
-            <a:r>
-              <a:rPr lang="en-US" b="1" dirty="0"/>
-              <a:t> and Templates</a:t>
-            </a:r>
-          </a:p>
-        </p:txBody>
-      </p:sp>
-      <p:sp>
-        <p:nvSpPr>
-          <p:cNvPr id="5" name="Content Placeholder 4">
-            <a:extLst>
-              <a:ext uri="{FF2B5EF4-FFF2-40B4-BE49-F238E27FC236}">
-                <a16:creationId xmlns:a16="http://schemas.microsoft.com/office/drawing/2014/main" id="{9CEDCF1E-2A7B-ADA3-8EC4-88A8D88C5D8D}"/>
-              </a:ext>
-            </a:extLst>
-          </p:cNvPr>
-          <p:cNvSpPr>
-            <a:spLocks noGrp="1"/>
-          </p:cNvSpPr>
-          <p:nvPr>
-            <p:ph idx="1"/>
-          </p:nvPr>
-        </p:nvSpPr>
-        <p:spPr/>
-        <p:txBody>
-          <a:bodyPr/>
-          <a:lstStyle/>
-          <a:p>
-            <a:r>
-              <a:rPr lang="en-GB" dirty="0"/>
-              <a:t>DEE2025 Coding </a:t>
-            </a:r>
-            <a:r>
-              <a:rPr lang="en-GB" dirty="0" err="1"/>
-              <a:t>Github</a:t>
-            </a:r>
-            <a:r>
-              <a:rPr lang="en-GB" dirty="0"/>
-              <a:t> page</a:t>
-            </a:r>
-          </a:p>
-        </p:txBody>
-      </p:sp>
-      <p:pic>
-        <p:nvPicPr>
-          <p:cNvPr id="7" name="Picture 6" descr="A qr code on a white background&#10;&#10;AI-generated content may be incorrect.">
-            <a:extLst>
-              <a:ext uri="{FF2B5EF4-FFF2-40B4-BE49-F238E27FC236}">
-                <a16:creationId xmlns:a16="http://schemas.microsoft.com/office/drawing/2014/main" id="{AB721F09-844E-BA7F-9952-DEAB144E6D82}"/>
-              </a:ext>
-            </a:extLst>
-          </p:cNvPr>
-          <p:cNvPicPr>
-            <a:picLocks noChangeAspect="1"/>
-          </p:cNvPicPr>
-          <p:nvPr/>
-        </p:nvPicPr>
-        <p:blipFill>
-          <a:blip r:embed="rId3"/>
-          <a:stretch>
-            <a:fillRect/>
-          </a:stretch>
-        </p:blipFill>
-        <p:spPr>
-          <a:xfrm>
-            <a:off x="8593330" y="2569083"/>
-            <a:ext cx="2122430" cy="2743200"/>
-          </a:xfrm>
-          <a:prstGeom prst="rect">
-            <a:avLst/>
-          </a:prstGeom>
-        </p:spPr>
-      </p:pic>
-      <p:sp>
-        <p:nvSpPr>
-          <p:cNvPr id="8" name="TextBox 7">
-            <a:extLst>
-              <a:ext uri="{FF2B5EF4-FFF2-40B4-BE49-F238E27FC236}">
-                <a16:creationId xmlns:a16="http://schemas.microsoft.com/office/drawing/2014/main" id="{B4F02907-6B65-FB1B-C29B-7FE9B4838D67}"/>
-              </a:ext>
-            </a:extLst>
-          </p:cNvPr>
-          <p:cNvSpPr txBox="1"/>
-          <p:nvPr/>
-        </p:nvSpPr>
-        <p:spPr>
-          <a:xfrm>
-            <a:off x="4716820" y="5771746"/>
-            <a:ext cx="6094476" cy="830997"/>
-          </a:xfrm>
-          <a:prstGeom prst="rect">
-            <a:avLst/>
-          </a:prstGeom>
-          <a:noFill/>
-        </p:spPr>
-        <p:txBody>
-          <a:bodyPr wrap="square">
-            <a:spAutoFit/>
-          </a:bodyPr>
-          <a:lstStyle/>
-          <a:p>
-            <a:pPr algn="r"/>
-            <a:r>
-              <a:rPr lang="en-GB" sz="2400" dirty="0">
-                <a:hlinkClick r:id="rId4"/>
-              </a:rPr>
-              <a:t>https://datasquad.github.io/DEE2025_coding/</a:t>
-            </a:r>
-            <a:endParaRPr lang="en-GB" sz="2400" dirty="0"/>
-          </a:p>
-          <a:p>
-            <a:pPr algn="r"/>
-            <a:endParaRPr lang="en-GB" sz="2400" dirty="0"/>
-          </a:p>
-        </p:txBody>
-      </p:sp>
-    </p:spTree>
-    <p:extLst>
-      <p:ext uri="{BB962C8B-B14F-4D97-AF65-F5344CB8AC3E}">
-        <p14:creationId xmlns:p14="http://schemas.microsoft.com/office/powerpoint/2010/main" val="3068507230"/>
-      </p:ext>
-    </p:extLst>
-  </p:cSld>
-  <p:clrMapOvr>
-    <a:masterClrMapping/>
-  </p:clrMapOvr>
-</p:sld>
-</file>
-
 <file path=ppt/slides/slide34.xml><?xml version="1.0" encoding="utf-8"?>
 <p:sld xmlns:a="http://schemas.openxmlformats.org/drawingml/2006/main" xmlns:r="http://schemas.openxmlformats.org/officeDocument/2006/relationships" xmlns:p="http://schemas.openxmlformats.org/presentationml/2006/main">
   <p:cSld>
@@ -24875,17 +25090,25 @@
           <a:p>
             <a:r>
               <a:rPr lang="en-US" b="1" dirty="0"/>
-              <a:t>Group Reflection </a:t>
+              <a:t>Complete </a:t>
+            </a:r>
+            <a:r>
+              <a:rPr lang="en-US" b="1" dirty="0" err="1"/>
+              <a:t>Workthrough</a:t>
+            </a:r>
+            <a:r>
+              <a:rPr lang="en-US" b="1" dirty="0"/>
+              <a:t> and Templates</a:t>
             </a:r>
           </a:p>
         </p:txBody>
       </p:sp>
       <p:sp>
         <p:nvSpPr>
-          <p:cNvPr id="3" name="Content Placeholder 2">
+          <p:cNvPr id="5" name="Content Placeholder 4">
             <a:extLst>
               <a:ext uri="{FF2B5EF4-FFF2-40B4-BE49-F238E27FC236}">
-                <a16:creationId xmlns:a16="http://schemas.microsoft.com/office/drawing/2014/main" id="{D2FC0861-9226-2BB8-B3FF-0648B971E549}"/>
+                <a16:creationId xmlns:a16="http://schemas.microsoft.com/office/drawing/2014/main" id="{9CEDCF1E-2A7B-ADA3-8EC4-88A8D88C5D8D}"/>
               </a:ext>
             </a:extLst>
           </p:cNvPr>
@@ -24901,25 +25124,159 @@
           <a:bodyPr/>
           <a:lstStyle/>
           <a:p>
-            <a:pPr lvl="0"/>
-            <a:r>
-              <a:rPr lang="en-US" dirty="0"/>
-              <a:t>Discuss barriers, benefits, and possible modifications. </a:t>
-            </a:r>
-          </a:p>
-          <a:p>
-            <a:pPr lvl="0"/>
-            <a:r>
-              <a:rPr lang="en-US" dirty="0"/>
-              <a:t>Share practical tips for integrating these strategies </a:t>
-            </a:r>
+            <a:r>
+              <a:rPr lang="en-GB" dirty="0"/>
+              <a:t>DEE2025 Coding </a:t>
+            </a:r>
+            <a:r>
+              <a:rPr lang="en-GB" dirty="0" err="1"/>
+              <a:t>Github</a:t>
+            </a:r>
+            <a:r>
+              <a:rPr lang="en-GB" dirty="0"/>
+              <a:t> page</a:t>
+            </a:r>
+          </a:p>
+        </p:txBody>
+      </p:sp>
+      <p:pic>
+        <p:nvPicPr>
+          <p:cNvPr id="7" name="Picture 6" descr="A qr code on a white background&#10;&#10;AI-generated content may be incorrect.">
+            <a:extLst>
+              <a:ext uri="{FF2B5EF4-FFF2-40B4-BE49-F238E27FC236}">
+                <a16:creationId xmlns:a16="http://schemas.microsoft.com/office/drawing/2014/main" id="{AB721F09-844E-BA7F-9952-DEAB144E6D82}"/>
+              </a:ext>
+            </a:extLst>
+          </p:cNvPr>
+          <p:cNvPicPr>
+            <a:picLocks noChangeAspect="1"/>
+          </p:cNvPicPr>
+          <p:nvPr/>
+        </p:nvPicPr>
+        <p:blipFill>
+          <a:blip r:embed="rId3"/>
+          <a:stretch>
+            <a:fillRect/>
+          </a:stretch>
+        </p:blipFill>
+        <p:spPr>
+          <a:xfrm>
+            <a:off x="9774858" y="365125"/>
+            <a:ext cx="2122430" cy="2743200"/>
+          </a:xfrm>
+          <a:prstGeom prst="rect">
+            <a:avLst/>
+          </a:prstGeom>
+        </p:spPr>
+      </p:pic>
+      <p:sp>
+        <p:nvSpPr>
+          <p:cNvPr id="8" name="TextBox 7">
+            <a:extLst>
+              <a:ext uri="{FF2B5EF4-FFF2-40B4-BE49-F238E27FC236}">
+                <a16:creationId xmlns:a16="http://schemas.microsoft.com/office/drawing/2014/main" id="{B4F02907-6B65-FB1B-C29B-7FE9B4838D67}"/>
+              </a:ext>
+            </a:extLst>
+          </p:cNvPr>
+          <p:cNvSpPr txBox="1"/>
+          <p:nvPr/>
+        </p:nvSpPr>
+        <p:spPr>
+          <a:xfrm>
+            <a:off x="1038671" y="2277328"/>
+            <a:ext cx="6094476" cy="830997"/>
+          </a:xfrm>
+          <a:prstGeom prst="rect">
+            <a:avLst/>
+          </a:prstGeom>
+          <a:noFill/>
+        </p:spPr>
+        <p:txBody>
+          <a:bodyPr wrap="square">
+            <a:spAutoFit/>
+          </a:bodyPr>
+          <a:lstStyle/>
+          <a:p>
+            <a:pPr algn="r"/>
+            <a:r>
+              <a:rPr lang="en-GB" sz="2400" dirty="0">
+                <a:hlinkClick r:id="rId4"/>
+              </a:rPr>
+              <a:t>https://datasquad.github.io/DEE2025_coding/</a:t>
+            </a:r>
+            <a:endParaRPr lang="en-GB" sz="2400" dirty="0"/>
+          </a:p>
+          <a:p>
+            <a:pPr algn="r"/>
+            <a:endParaRPr lang="en-GB" sz="2400" dirty="0"/>
+          </a:p>
+        </p:txBody>
+      </p:sp>
+      <p:sp>
+        <p:nvSpPr>
+          <p:cNvPr id="4" name="TextBox 3">
+            <a:extLst>
+              <a:ext uri="{FF2B5EF4-FFF2-40B4-BE49-F238E27FC236}">
+                <a16:creationId xmlns:a16="http://schemas.microsoft.com/office/drawing/2014/main" id="{31312F3E-BAEE-90FD-7DB5-BD468F11684C}"/>
+              </a:ext>
+            </a:extLst>
+          </p:cNvPr>
+          <p:cNvSpPr txBox="1"/>
+          <p:nvPr/>
+        </p:nvSpPr>
+        <p:spPr>
+          <a:xfrm>
+            <a:off x="838200" y="3396149"/>
+            <a:ext cx="7749301" cy="2492990"/>
+          </a:xfrm>
+          <a:prstGeom prst="rect">
+            <a:avLst/>
+          </a:prstGeom>
+          <a:noFill/>
+        </p:spPr>
+        <p:txBody>
+          <a:bodyPr wrap="none" rtlCol="0">
+            <a:spAutoFit/>
+          </a:bodyPr>
+          <a:lstStyle/>
+          <a:p>
+            <a:r>
+              <a:rPr lang="en-GB" sz="4400" dirty="0"/>
+              <a:t>Further Resources</a:t>
+            </a:r>
+          </a:p>
+          <a:p>
+            <a:endParaRPr lang="en-GB" sz="2800" dirty="0"/>
+          </a:p>
+          <a:p>
+            <a:pPr marL="285750" indent="-285750">
+              <a:buFont typeface="Arial" panose="020B0604020202020204" pitchFamily="34" charset="0"/>
+              <a:buChar char="•"/>
+            </a:pPr>
+            <a:r>
+              <a:rPr lang="en-GB" sz="2800" dirty="0"/>
+              <a:t>Econometric Computing Learning Resource (ECLR)</a:t>
+            </a:r>
+            <a:br>
+              <a:rPr lang="en-GB" sz="2800" dirty="0"/>
+            </a:br>
+            <a:r>
+              <a:rPr lang="en-GB" sz="2800" dirty="0">
+                <a:hlinkClick r:id="rId5"/>
+              </a:rPr>
+              <a:t>https://datasquad.github.io/ECLR/</a:t>
+            </a:r>
+            <a:endParaRPr lang="en-GB" sz="2800" dirty="0"/>
+          </a:p>
+          <a:p>
+            <a:endParaRPr lang="en-GB" sz="2800" dirty="0"/>
           </a:p>
         </p:txBody>
       </p:sp>
     </p:spTree>
     <p:extLst>
       <p:ext uri="{BB962C8B-B14F-4D97-AF65-F5344CB8AC3E}">
-        <p14:creationId xmlns:p14="http://schemas.microsoft.com/office/powerpoint/2010/main" val="845505704"/>
+        <p14:creationId xmlns:p14="http://schemas.microsoft.com/office/powerpoint/2010/main" val="3068507230"/>
       </p:ext>
     </p:extLst>
   </p:cSld>
@@ -24969,7 +25326,7 @@
           <a:p>
             <a:r>
               <a:rPr lang="en-US" b="1" dirty="0"/>
-              <a:t>Wrap-up &amp; Takeaways</a:t>
+              <a:t>Group Reflection </a:t>
             </a:r>
           </a:p>
         </p:txBody>
@@ -24998,83 +25355,116 @@
             <a:pPr lvl="0"/>
             <a:r>
               <a:rPr lang="en-US" dirty="0"/>
-              <a:t>Summary of key points</a:t>
+              <a:t>Discuss barriers, benefits, and possible modifications. </a:t>
             </a:r>
           </a:p>
           <a:p>
             <a:pPr lvl="0"/>
             <a:r>
               <a:rPr lang="en-US" dirty="0"/>
-              <a:t>Provide a link to GitHub/OneDrive folder with: Editable worksheet templates</a:t>
-            </a:r>
-          </a:p>
-          <a:p>
-            <a:pPr lvl="0"/>
-            <a:r>
-              <a:rPr lang="en-US" dirty="0"/>
-              <a:t>Invitation to follow-up or collaborate </a:t>
+              <a:t>Share practical tips for integrating these strategies </a:t>
+            </a:r>
+          </a:p>
+        </p:txBody>
+      </p:sp>
+    </p:spTree>
+    <p:extLst>
+      <p:ext uri="{BB962C8B-B14F-4D97-AF65-F5344CB8AC3E}">
+        <p14:creationId xmlns:p14="http://schemas.microsoft.com/office/powerpoint/2010/main" val="845505704"/>
+      </p:ext>
+    </p:extLst>
+  </p:cSld>
+  <p:clrMapOvr>
+    <a:masterClrMapping/>
+  </p:clrMapOvr>
+</p:sld>
+</file>
+
+<file path=ppt/slides/slide36.xml><?xml version="1.0" encoding="utf-8"?>
+<p:sld xmlns:a="http://schemas.openxmlformats.org/drawingml/2006/main" xmlns:r="http://schemas.openxmlformats.org/officeDocument/2006/relationships" xmlns:p="http://schemas.openxmlformats.org/presentationml/2006/main">
+  <p:cSld>
+    <p:spTree>
+      <p:nvGrpSpPr>
+        <p:cNvPr id="1" name=""/>
+        <p:cNvGrpSpPr/>
+        <p:nvPr/>
+      </p:nvGrpSpPr>
+      <p:grpSpPr>
+        <a:xfrm>
+          <a:off x="0" y="0"/>
+          <a:ext cx="0" cy="0"/>
+          <a:chOff x="0" y="0"/>
+          <a:chExt cx="0" cy="0"/>
+        </a:xfrm>
+      </p:grpSpPr>
+      <p:sp>
+        <p:nvSpPr>
+          <p:cNvPr id="2" name="Title 1">
+            <a:extLst>
+              <a:ext uri="{FF2B5EF4-FFF2-40B4-BE49-F238E27FC236}">
+                <a16:creationId xmlns:a16="http://schemas.microsoft.com/office/drawing/2014/main" id="{697A6EAD-477B-C87E-9908-4D6CFD5CA6F2}"/>
+              </a:ext>
+            </a:extLst>
+          </p:cNvPr>
+          <p:cNvSpPr>
+            <a:spLocks noGrp="1"/>
+          </p:cNvSpPr>
+          <p:nvPr>
+            <p:ph type="title"/>
+          </p:nvPr>
+        </p:nvSpPr>
+        <p:spPr/>
+        <p:txBody>
+          <a:bodyPr/>
+          <a:lstStyle/>
+          <a:p>
+            <a:r>
+              <a:rPr lang="en-US" b="1" dirty="0"/>
+              <a:t>Wrap-up &amp; Takeaways</a:t>
             </a:r>
           </a:p>
         </p:txBody>
       </p:sp>
       <p:sp>
         <p:nvSpPr>
-          <p:cNvPr id="4" name="TextBox 3">
+          <p:cNvPr id="3" name="Content Placeholder 2">
             <a:extLst>
               <a:ext uri="{FF2B5EF4-FFF2-40B4-BE49-F238E27FC236}">
-                <a16:creationId xmlns:a16="http://schemas.microsoft.com/office/drawing/2014/main" id="{31312F3E-BAEE-90FD-7DB5-BD468F11684C}"/>
+                <a16:creationId xmlns:a16="http://schemas.microsoft.com/office/drawing/2014/main" id="{D2FC0861-9226-2BB8-B3FF-0648B971E549}"/>
               </a:ext>
             </a:extLst>
           </p:cNvPr>
-          <p:cNvSpPr txBox="1"/>
-          <p:nvPr/>
+          <p:cNvSpPr>
+            <a:spLocks noGrp="1"/>
+          </p:cNvSpPr>
+          <p:nvPr>
+            <p:ph idx="1"/>
+          </p:nvPr>
         </p:nvSpPr>
-        <p:spPr>
-          <a:xfrm>
-            <a:off x="838200" y="4114860"/>
-            <a:ext cx="7749301" cy="2492990"/>
-          </a:xfrm>
-          <a:prstGeom prst="rect">
-            <a:avLst/>
-          </a:prstGeom>
-          <a:noFill/>
-        </p:spPr>
+        <p:spPr/>
         <p:txBody>
-          <a:bodyPr wrap="none" rtlCol="0">
-            <a:spAutoFit/>
-          </a:bodyPr>
+          <a:bodyPr/>
           <a:lstStyle/>
           <a:p>
-            <a:r>
-              <a:rPr lang="en-GB" sz="4400" dirty="0"/>
-              <a:t>Further Resources</a:t>
-            </a:r>
-          </a:p>
-          <a:p>
-            <a:endParaRPr lang="en-GB" sz="2800" dirty="0"/>
-          </a:p>
-          <a:p>
-            <a:pPr marL="285750" indent="-285750">
-              <a:buFont typeface="Arial" panose="020B0604020202020204" pitchFamily="34" charset="0"/>
-              <a:buChar char="•"/>
-            </a:pPr>
-            <a:r>
-              <a:rPr lang="en-GB" sz="2800" dirty="0"/>
-              <a:t>Econometric Computing Learning Resource (ECLR)</a:t>
-            </a:r>
-            <a:br>
-              <a:rPr lang="en-GB" sz="2800" dirty="0"/>
-            </a:br>
-            <a:r>
-              <a:rPr lang="en-GB" sz="2800" dirty="0">
-                <a:hlinkClick r:id="rId2"/>
-              </a:rPr>
-              <a:t>https://datasquad.github.io/ECLR/</a:t>
-            </a:r>
-            <a:endParaRPr lang="en-GB" sz="2800" dirty="0"/>
-          </a:p>
-          <a:p>
-            <a:endParaRPr lang="en-GB" sz="2800" dirty="0"/>
+            <a:pPr lvl="0"/>
+            <a:r>
+              <a:rPr lang="en-US" dirty="0"/>
+              <a:t>Summary of key points</a:t>
+            </a:r>
+          </a:p>
+          <a:p>
+            <a:pPr lvl="0"/>
+            <a:r>
+              <a:rPr lang="en-US" dirty="0"/>
+              <a:t>Provide a link to GitHub/OneDrive folder with: Editable worksheet templates</a:t>
+            </a:r>
+          </a:p>
+          <a:p>
+            <a:pPr lvl="0"/>
+            <a:r>
+              <a:rPr lang="en-US" dirty="0"/>
+              <a:t>Invitation to follow-up or collaborate </a:t>
+            </a:r>
           </a:p>
         </p:txBody>
       </p:sp>
@@ -25091,7 +25481,7 @@
 </p:sld>
 </file>
 
-<file path=ppt/slides/slide36.xml><?xml version="1.0" encoding="utf-8"?>
+<file path=ppt/slides/slide37.xml><?xml version="1.0" encoding="utf-8"?>
 <p:sld xmlns:a="http://schemas.openxmlformats.org/drawingml/2006/main" xmlns:r="http://schemas.openxmlformats.org/officeDocument/2006/relationships" xmlns:p="http://schemas.openxmlformats.org/presentationml/2006/main">
   <p:cSld>
     <p:spTree>
@@ -25249,6 +25639,396 @@
         </p:nvSpPr>
         <p:spPr>
           <a:xfrm>
+            <a:off x="250995" y="267669"/>
+            <a:ext cx="10515600" cy="741299"/>
+          </a:xfrm>
+        </p:spPr>
+        <p:txBody>
+          <a:bodyPr>
+            <a:normAutofit/>
+          </a:bodyPr>
+          <a:lstStyle/>
+          <a:p>
+            <a:r>
+              <a:rPr lang="en-GB" b="1" dirty="0"/>
+              <a:t>Why This Workshop?</a:t>
+            </a:r>
+            <a:endParaRPr lang="en-US" b="1" dirty="0"/>
+          </a:p>
+        </p:txBody>
+      </p:sp>
+      <p:sp>
+        <p:nvSpPr>
+          <p:cNvPr id="4" name="Content Placeholder 2">
+            <a:extLst>
+              <a:ext uri="{FF2B5EF4-FFF2-40B4-BE49-F238E27FC236}">
+                <a16:creationId xmlns:a16="http://schemas.microsoft.com/office/drawing/2014/main" id="{217CAB55-A58C-FF2E-68C7-88796844A9EF}"/>
+              </a:ext>
+            </a:extLst>
+          </p:cNvPr>
+          <p:cNvSpPr>
+            <a:spLocks noGrp="1"/>
+          </p:cNvSpPr>
+          <p:nvPr>
+            <p:ph idx="1"/>
+          </p:nvPr>
+        </p:nvSpPr>
+        <p:spPr>
+          <a:xfrm>
+            <a:off x="250995" y="1136437"/>
+            <a:ext cx="8827971" cy="5094999"/>
+          </a:xfrm>
+        </p:spPr>
+        <p:txBody>
+          <a:bodyPr>
+            <a:noAutofit/>
+          </a:bodyPr>
+          <a:lstStyle/>
+          <a:p>
+            <a:r>
+              <a:rPr lang="en-US" dirty="0"/>
+              <a:t>Steep learning curve for beginners, particularly in grasping coding logic and syntax.</a:t>
+            </a:r>
+          </a:p>
+          <a:p>
+            <a:r>
+              <a:rPr lang="en-US" dirty="0"/>
+              <a:t>Need to foster independent coding and problem-solving skills.</a:t>
+            </a:r>
+          </a:p>
+          <a:p>
+            <a:r>
+              <a:rPr lang="en-US" dirty="0"/>
+              <a:t>How to adjust instruction in the presence of AI?</a:t>
+            </a:r>
+          </a:p>
+          <a:p>
+            <a:pPr marL="0" indent="0">
+              <a:buNone/>
+            </a:pPr>
+            <a:r>
+              <a:rPr lang="en-GB" dirty="0"/>
+              <a:t>Shift focus:</a:t>
+            </a:r>
+          </a:p>
+          <a:p>
+            <a:pPr>
+              <a:buFont typeface="Arial" panose="020B0604020202020204" pitchFamily="34" charset="0"/>
+              <a:buChar char="•"/>
+            </a:pPr>
+            <a:r>
+              <a:rPr lang="en-GB" dirty="0"/>
+              <a:t>From memorising syntax → to understanding coding processes</a:t>
+            </a:r>
+          </a:p>
+          <a:p>
+            <a:pPr>
+              <a:buFont typeface="Arial" panose="020B0604020202020204" pitchFamily="34" charset="0"/>
+              <a:buChar char="•"/>
+            </a:pPr>
+            <a:r>
+              <a:rPr lang="en-GB" dirty="0"/>
+              <a:t>From “knowing the right code” → to engaging actively with coding challenges</a:t>
+            </a:r>
+          </a:p>
+          <a:p>
+            <a:pPr>
+              <a:buFont typeface="Arial" panose="020B0604020202020204" pitchFamily="34" charset="0"/>
+              <a:buChar char="•"/>
+            </a:pPr>
+            <a:r>
+              <a:rPr lang="en-GB" dirty="0"/>
+              <a:t>From avoiding resources → to using web searches and LLMs productively</a:t>
+            </a:r>
+          </a:p>
+          <a:p>
+            <a:endParaRPr lang="en-US" dirty="0"/>
+          </a:p>
+          <a:p>
+            <a:endParaRPr lang="en-US" dirty="0"/>
+          </a:p>
+        </p:txBody>
+      </p:sp>
+      <p:pic>
+        <p:nvPicPr>
+          <p:cNvPr id="5" name="Picture 4" descr="A drawing of a person climbing a curve&#10;&#10;Description automatically generated">
+            <a:extLst>
+              <a:ext uri="{FF2B5EF4-FFF2-40B4-BE49-F238E27FC236}">
+                <a16:creationId xmlns:a16="http://schemas.microsoft.com/office/drawing/2014/main" id="{12AF4DF6-9D25-32E0-8DC1-72D8CC1BC6EA}"/>
+              </a:ext>
+            </a:extLst>
+          </p:cNvPr>
+          <p:cNvPicPr>
+            <a:picLocks noChangeAspect="1"/>
+          </p:cNvPicPr>
+          <p:nvPr/>
+        </p:nvPicPr>
+        <p:blipFill>
+          <a:blip r:embed="rId2"/>
+          <a:stretch>
+            <a:fillRect/>
+          </a:stretch>
+        </p:blipFill>
+        <p:spPr>
+          <a:xfrm>
+            <a:off x="9265511" y="897968"/>
+            <a:ext cx="2516177" cy="2531032"/>
+          </a:xfrm>
+          <a:prstGeom prst="rect">
+            <a:avLst/>
+          </a:prstGeom>
+        </p:spPr>
+      </p:pic>
+      <p:pic>
+        <p:nvPicPr>
+          <p:cNvPr id="6" name="Picture 5" descr="A cartoon character with a speech bubble&#10;&#10;Description automatically generated">
+            <a:extLst>
+              <a:ext uri="{FF2B5EF4-FFF2-40B4-BE49-F238E27FC236}">
+                <a16:creationId xmlns:a16="http://schemas.microsoft.com/office/drawing/2014/main" id="{6948FF73-F3CF-190D-727C-9A58148A4CE3}"/>
+              </a:ext>
+            </a:extLst>
+          </p:cNvPr>
+          <p:cNvPicPr>
+            <a:picLocks noChangeAspect="1"/>
+          </p:cNvPicPr>
+          <p:nvPr/>
+        </p:nvPicPr>
+        <p:blipFill>
+          <a:blip r:embed="rId3"/>
+          <a:stretch>
+            <a:fillRect/>
+          </a:stretch>
+        </p:blipFill>
+        <p:spPr>
+          <a:xfrm>
+            <a:off x="9202446" y="3683937"/>
+            <a:ext cx="2642306" cy="2531032"/>
+          </a:xfrm>
+          <a:prstGeom prst="rect">
+            <a:avLst/>
+          </a:prstGeom>
+        </p:spPr>
+      </p:pic>
+    </p:spTree>
+    <p:extLst>
+      <p:ext uri="{BB962C8B-B14F-4D97-AF65-F5344CB8AC3E}">
+        <p14:creationId xmlns:p14="http://schemas.microsoft.com/office/powerpoint/2010/main" val="4022208039"/>
+      </p:ext>
+    </p:extLst>
+  </p:cSld>
+  <p:clrMapOvr>
+    <a:masterClrMapping/>
+  </p:clrMapOvr>
+  <p:timing>
+    <p:tnLst>
+      <p:par>
+        <p:cTn id="1" dur="indefinite" restart="never" nodeType="tmRoot">
+          <p:childTnLst>
+            <p:seq concurrent="1" nextAc="seek">
+              <p:cTn id="2" dur="indefinite" nodeType="mainSeq">
+                <p:childTnLst>
+                  <p:par>
+                    <p:cTn id="3" fill="hold">
+                      <p:stCondLst>
+                        <p:cond delay="indefinite"/>
+                      </p:stCondLst>
+                      <p:childTnLst>
+                        <p:par>
+                          <p:cTn id="4" fill="hold">
+                            <p:stCondLst>
+                              <p:cond delay="0"/>
+                            </p:stCondLst>
+                            <p:childTnLst>
+                              <p:par>
+                                <p:cTn id="5" presetID="1" presetClass="entr" presetSubtype="0" fill="hold" nodeType="clickEffect">
+                                  <p:stCondLst>
+                                    <p:cond delay="0"/>
+                                  </p:stCondLst>
+                                  <p:childTnLst>
+                                    <p:set>
+                                      <p:cBhvr>
+                                        <p:cTn id="6" dur="1" fill="hold">
+                                          <p:stCondLst>
+                                            <p:cond delay="0"/>
+                                          </p:stCondLst>
+                                        </p:cTn>
+                                        <p:tgtEl>
+                                          <p:spTgt spid="4">
+                                            <p:txEl>
+                                              <p:pRg st="3" end="3"/>
+                                            </p:txEl>
+                                          </p:spTgt>
+                                        </p:tgtEl>
+                                        <p:attrNameLst>
+                                          <p:attrName>style.visibility</p:attrName>
+                                        </p:attrNameLst>
+                                      </p:cBhvr>
+                                      <p:to>
+                                        <p:strVal val="visible"/>
+                                      </p:to>
+                                    </p:set>
+                                  </p:childTnLst>
+                                </p:cTn>
+                              </p:par>
+                              <p:par>
+                                <p:cTn id="7" presetID="1" presetClass="entr" presetSubtype="0" fill="hold" nodeType="withEffect">
+                                  <p:stCondLst>
+                                    <p:cond delay="0"/>
+                                  </p:stCondLst>
+                                  <p:childTnLst>
+                                    <p:set>
+                                      <p:cBhvr>
+                                        <p:cTn id="8" dur="1" fill="hold">
+                                          <p:stCondLst>
+                                            <p:cond delay="0"/>
+                                          </p:stCondLst>
+                                        </p:cTn>
+                                        <p:tgtEl>
+                                          <p:spTgt spid="4">
+                                            <p:txEl>
+                                              <p:pRg st="4" end="4"/>
+                                            </p:txEl>
+                                          </p:spTgt>
+                                        </p:tgtEl>
+                                        <p:attrNameLst>
+                                          <p:attrName>style.visibility</p:attrName>
+                                        </p:attrNameLst>
+                                      </p:cBhvr>
+                                      <p:to>
+                                        <p:strVal val="visible"/>
+                                      </p:to>
+                                    </p:set>
+                                  </p:childTnLst>
+                                </p:cTn>
+                              </p:par>
+                              <p:par>
+                                <p:cTn id="9" presetID="1" presetClass="entr" presetSubtype="0" fill="hold" nodeType="withEffect">
+                                  <p:stCondLst>
+                                    <p:cond delay="0"/>
+                                  </p:stCondLst>
+                                  <p:childTnLst>
+                                    <p:set>
+                                      <p:cBhvr>
+                                        <p:cTn id="10" dur="1" fill="hold">
+                                          <p:stCondLst>
+                                            <p:cond delay="0"/>
+                                          </p:stCondLst>
+                                        </p:cTn>
+                                        <p:tgtEl>
+                                          <p:spTgt spid="4">
+                                            <p:txEl>
+                                              <p:pRg st="5" end="5"/>
+                                            </p:txEl>
+                                          </p:spTgt>
+                                        </p:tgtEl>
+                                        <p:attrNameLst>
+                                          <p:attrName>style.visibility</p:attrName>
+                                        </p:attrNameLst>
+                                      </p:cBhvr>
+                                      <p:to>
+                                        <p:strVal val="visible"/>
+                                      </p:to>
+                                    </p:set>
+                                  </p:childTnLst>
+                                </p:cTn>
+                              </p:par>
+                              <p:par>
+                                <p:cTn id="11" presetID="1" presetClass="entr" presetSubtype="0" fill="hold" nodeType="withEffect">
+                                  <p:stCondLst>
+                                    <p:cond delay="0"/>
+                                  </p:stCondLst>
+                                  <p:childTnLst>
+                                    <p:set>
+                                      <p:cBhvr>
+                                        <p:cTn id="12" dur="1" fill="hold">
+                                          <p:stCondLst>
+                                            <p:cond delay="0"/>
+                                          </p:stCondLst>
+                                        </p:cTn>
+                                        <p:tgtEl>
+                                          <p:spTgt spid="4">
+                                            <p:txEl>
+                                              <p:pRg st="6" end="6"/>
+                                            </p:txEl>
+                                          </p:spTgt>
+                                        </p:tgtEl>
+                                        <p:attrNameLst>
+                                          <p:attrName>style.visibility</p:attrName>
+                                        </p:attrNameLst>
+                                      </p:cBhvr>
+                                      <p:to>
+                                        <p:strVal val="visible"/>
+                                      </p:to>
+                                    </p:set>
+                                  </p:childTnLst>
+                                </p:cTn>
+                              </p:par>
+                            </p:childTnLst>
+                          </p:cTn>
+                        </p:par>
+                      </p:childTnLst>
+                    </p:cTn>
+                  </p:par>
+                </p:childTnLst>
+              </p:cTn>
+              <p:prevCondLst>
+                <p:cond evt="onPrev" delay="0">
+                  <p:tgtEl>
+                    <p:sldTgt/>
+                  </p:tgtEl>
+                </p:cond>
+              </p:prevCondLst>
+              <p:nextCondLst>
+                <p:cond evt="onNext" delay="0">
+                  <p:tgtEl>
+                    <p:sldTgt/>
+                  </p:tgtEl>
+                </p:cond>
+              </p:nextCondLst>
+            </p:seq>
+          </p:childTnLst>
+        </p:cTn>
+      </p:par>
+    </p:tnLst>
+  </p:timing>
+</p:sld>
+</file>
+
+<file path=ppt/slides/slide5.xml><?xml version="1.0" encoding="utf-8"?>
+<p:sld xmlns:a="http://schemas.openxmlformats.org/drawingml/2006/main" xmlns:r="http://schemas.openxmlformats.org/officeDocument/2006/relationships" xmlns:p="http://schemas.openxmlformats.org/presentationml/2006/main">
+  <p:cSld>
+    <p:spTree>
+      <p:nvGrpSpPr>
+        <p:cNvPr id="1" name=""/>
+        <p:cNvGrpSpPr/>
+        <p:nvPr/>
+      </p:nvGrpSpPr>
+      <p:grpSpPr>
+        <a:xfrm>
+          <a:off x="0" y="0"/>
+          <a:ext cx="0" cy="0"/>
+          <a:chOff x="0" y="0"/>
+          <a:chExt cx="0" cy="0"/>
+        </a:xfrm>
+      </p:grpSpPr>
+      <p:sp>
+        <p:nvSpPr>
+          <p:cNvPr id="2" name="Title 1">
+            <a:extLst>
+              <a:ext uri="{FF2B5EF4-FFF2-40B4-BE49-F238E27FC236}">
+                <a16:creationId xmlns:a16="http://schemas.microsoft.com/office/drawing/2014/main" id="{697A6EAD-477B-C87E-9908-4D6CFD5CA6F2}"/>
+              </a:ext>
+            </a:extLst>
+          </p:cNvPr>
+          <p:cNvSpPr>
+            <a:spLocks noGrp="1"/>
+          </p:cNvSpPr>
+          <p:nvPr>
+            <p:ph type="title"/>
+          </p:nvPr>
+        </p:nvSpPr>
+        <p:spPr>
+          <a:xfrm>
             <a:off x="838200" y="365125"/>
             <a:ext cx="10515600" cy="741299"/>
           </a:xfrm>
@@ -25429,7 +26209,7 @@
 </p:sld>
 </file>
 
-<file path=ppt/slides/slide5.xml><?xml version="1.0" encoding="utf-8"?>
+<file path=ppt/slides/slide6.xml><?xml version="1.0" encoding="utf-8"?>
 <p:sld xmlns:a="http://schemas.openxmlformats.org/drawingml/2006/main" xmlns:r="http://schemas.openxmlformats.org/officeDocument/2006/relationships" xmlns:p="http://schemas.openxmlformats.org/presentationml/2006/main">
   <p:cSld>
     <p:spTree>
@@ -26758,7 +27538,7 @@
 </p:sld>
 </file>
 
-<file path=ppt/slides/slide6.xml><?xml version="1.0" encoding="utf-8"?>
+<file path=ppt/slides/slide7.xml><?xml version="1.0" encoding="utf-8"?>
 <p:sld xmlns:a="http://schemas.openxmlformats.org/drawingml/2006/main" xmlns:r="http://schemas.openxmlformats.org/officeDocument/2006/relationships" xmlns:p="http://schemas.openxmlformats.org/presentationml/2006/main">
   <p:cSld>
     <p:spTree>
@@ -27308,7 +28088,7 @@
 </p:sld>
 </file>
 
-<file path=ppt/slides/slide7.xml><?xml version="1.0" encoding="utf-8"?>
+<file path=ppt/slides/slide8.xml><?xml version="1.0" encoding="utf-8"?>
 <p:sld xmlns:a="http://schemas.openxmlformats.org/drawingml/2006/main" xmlns:r="http://schemas.openxmlformats.org/officeDocument/2006/relationships" xmlns:p="http://schemas.openxmlformats.org/presentationml/2006/main">
   <p:cSld>
     <p:spTree>
@@ -27922,7 +28702,7 @@
 </p:sld>
 </file>
 
-<file path=ppt/slides/slide8.xml><?xml version="1.0" encoding="utf-8"?>
+<file path=ppt/slides/slide9.xml><?xml version="1.0" encoding="utf-8"?>
 <p:sld xmlns:a="http://schemas.openxmlformats.org/drawingml/2006/main" xmlns:r="http://schemas.openxmlformats.org/officeDocument/2006/relationships" xmlns:p="http://schemas.openxmlformats.org/presentationml/2006/main">
   <p:cSld>
     <p:spTree>
@@ -28335,708 +29115,6 @@
     <p:extLst>
       <p:ext uri="{BB962C8B-B14F-4D97-AF65-F5344CB8AC3E}">
         <p14:creationId xmlns:p14="http://schemas.microsoft.com/office/powerpoint/2010/main" val="2048334721"/>
-      </p:ext>
-    </p:extLst>
-  </p:cSld>
-  <p:clrMapOvr>
-    <a:masterClrMapping/>
-  </p:clrMapOvr>
-</p:sld>
-</file>
-
-<file path=ppt/slides/slide9.xml><?xml version="1.0" encoding="utf-8"?>
-<p:sld xmlns:a="http://schemas.openxmlformats.org/drawingml/2006/main" xmlns:r="http://schemas.openxmlformats.org/officeDocument/2006/relationships" xmlns:p="http://schemas.openxmlformats.org/presentationml/2006/main">
-  <p:cSld>
-    <p:spTree>
-      <p:nvGrpSpPr>
-        <p:cNvPr id="1" name=""/>
-        <p:cNvGrpSpPr/>
-        <p:nvPr/>
-      </p:nvGrpSpPr>
-      <p:grpSpPr>
-        <a:xfrm>
-          <a:off x="0" y="0"/>
-          <a:ext cx="0" cy="0"/>
-          <a:chOff x="0" y="0"/>
-          <a:chExt cx="0" cy="0"/>
-        </a:xfrm>
-      </p:grpSpPr>
-      <p:sp>
-        <p:nvSpPr>
-          <p:cNvPr id="2" name="Title 1">
-            <a:extLst>
-              <a:ext uri="{FF2B5EF4-FFF2-40B4-BE49-F238E27FC236}">
-                <a16:creationId xmlns:a16="http://schemas.microsoft.com/office/drawing/2014/main" id="{697A6EAD-477B-C87E-9908-4D6CFD5CA6F2}"/>
-              </a:ext>
-            </a:extLst>
-          </p:cNvPr>
-          <p:cNvSpPr>
-            <a:spLocks noGrp="1"/>
-          </p:cNvSpPr>
-          <p:nvPr>
-            <p:ph type="title"/>
-          </p:nvPr>
-        </p:nvSpPr>
-        <p:spPr>
-          <a:xfrm>
-            <a:off x="1837426" y="365125"/>
-            <a:ext cx="9516374" cy="741299"/>
-          </a:xfrm>
-        </p:spPr>
-        <p:txBody>
-          <a:bodyPr>
-            <a:normAutofit/>
-          </a:bodyPr>
-          <a:lstStyle/>
-          <a:p>
-            <a:r>
-              <a:rPr lang="en-GB" b="1" dirty="0" err="1"/>
-              <a:t>Rmarkdown</a:t>
-            </a:r>
-            <a:r>
-              <a:rPr lang="en-GB" b="1" dirty="0"/>
-              <a:t> </a:t>
-            </a:r>
-            <a:r>
-              <a:rPr lang="en-US" altLang="zh-CN" b="1" dirty="0"/>
-              <a:t>D</a:t>
-            </a:r>
-            <a:r>
-              <a:rPr lang="en-GB" b="1" dirty="0" err="1"/>
-              <a:t>ocuments</a:t>
-            </a:r>
-            <a:endParaRPr lang="en-US" b="1" dirty="0"/>
-          </a:p>
-        </p:txBody>
-      </p:sp>
-      <p:pic>
-        <p:nvPicPr>
-          <p:cNvPr id="4" name="Picture 2">
-            <a:extLst>
-              <a:ext uri="{FF2B5EF4-FFF2-40B4-BE49-F238E27FC236}">
-                <a16:creationId xmlns:a16="http://schemas.microsoft.com/office/drawing/2014/main" id="{EC9FFF3F-CA5F-0363-3407-7D26FB2820F0}"/>
-              </a:ext>
-            </a:extLst>
-          </p:cNvPr>
-          <p:cNvPicPr>
-            <a:picLocks noChangeAspect="1" noChangeArrowheads="1"/>
-          </p:cNvPicPr>
-          <p:nvPr/>
-        </p:nvPicPr>
-        <p:blipFill>
-          <a:blip r:embed="rId2">
-            <a:extLst>
-              <a:ext uri="{28A0092B-C50C-407E-A947-70E740481C1C}">
-                <a14:useLocalDpi xmlns:a14="http://schemas.microsoft.com/office/drawing/2010/main" val="0"/>
-              </a:ext>
-            </a:extLst>
-          </a:blip>
-          <a:srcRect/>
-          <a:stretch>
-            <a:fillRect/>
-          </a:stretch>
-        </p:blipFill>
-        <p:spPr bwMode="auto">
-          <a:xfrm>
-            <a:off x="376867" y="273982"/>
-            <a:ext cx="1274292" cy="989450"/>
-          </a:xfrm>
-          <a:prstGeom prst="rect">
-            <a:avLst/>
-          </a:prstGeom>
-          <a:noFill/>
-          <a:extLst>
-            <a:ext uri="{909E8E84-426E-40DD-AFC4-6F175D3DCCD1}">
-              <a14:hiddenFill xmlns:a14="http://schemas.microsoft.com/office/drawing/2010/main">
-                <a:solidFill>
-                  <a:srgbClr val="FFFFFF"/>
-                </a:solidFill>
-              </a14:hiddenFill>
-            </a:ext>
-          </a:extLst>
-        </p:spPr>
-      </p:pic>
-      <p:pic>
-        <p:nvPicPr>
-          <p:cNvPr id="7" name="Picture 6">
-            <a:extLst>
-              <a:ext uri="{FF2B5EF4-FFF2-40B4-BE49-F238E27FC236}">
-                <a16:creationId xmlns:a16="http://schemas.microsoft.com/office/drawing/2014/main" id="{9091E60F-9C0B-16DF-3041-5429F75148AE}"/>
-              </a:ext>
-            </a:extLst>
-          </p:cNvPr>
-          <p:cNvPicPr>
-            <a:picLocks noChangeAspect="1"/>
-          </p:cNvPicPr>
-          <p:nvPr/>
-        </p:nvPicPr>
-        <p:blipFill>
-          <a:blip r:embed="rId3"/>
-          <a:stretch>
-            <a:fillRect/>
-          </a:stretch>
-        </p:blipFill>
-        <p:spPr>
-          <a:xfrm>
-            <a:off x="6242275" y="1843510"/>
-            <a:ext cx="5768752" cy="3956030"/>
-          </a:xfrm>
-          <a:prstGeom prst="rect">
-            <a:avLst/>
-          </a:prstGeom>
-        </p:spPr>
-      </p:pic>
-      <p:pic>
-        <p:nvPicPr>
-          <p:cNvPr id="8" name="Picture 7">
-            <a:extLst>
-              <a:ext uri="{FF2B5EF4-FFF2-40B4-BE49-F238E27FC236}">
-                <a16:creationId xmlns:a16="http://schemas.microsoft.com/office/drawing/2014/main" id="{52BB65C2-A8B9-0CF1-BF4C-7263478CF32B}"/>
-              </a:ext>
-            </a:extLst>
-          </p:cNvPr>
-          <p:cNvPicPr>
-            <a:picLocks noChangeAspect="1"/>
-          </p:cNvPicPr>
-          <p:nvPr/>
-        </p:nvPicPr>
-        <p:blipFill>
-          <a:blip r:embed="rId4"/>
-          <a:stretch>
-            <a:fillRect/>
-          </a:stretch>
-        </p:blipFill>
-        <p:spPr>
-          <a:xfrm>
-            <a:off x="209965" y="1746045"/>
-            <a:ext cx="5888841" cy="2144572"/>
-          </a:xfrm>
-          <a:prstGeom prst="rect">
-            <a:avLst/>
-          </a:prstGeom>
-          <a:ln w="38100">
-            <a:solidFill>
-              <a:schemeClr val="accent1"/>
-            </a:solidFill>
-          </a:ln>
-          <a:effectLst>
-            <a:outerShdw blurRad="50800" dist="38100" dir="18900000" algn="bl" rotWithShape="0">
-              <a:prstClr val="black">
-                <a:alpha val="40000"/>
-              </a:prstClr>
-            </a:outerShdw>
-          </a:effectLst>
-        </p:spPr>
-      </p:pic>
-      <p:sp>
-        <p:nvSpPr>
-          <p:cNvPr id="9" name="TextBox 8">
-            <a:extLst>
-              <a:ext uri="{FF2B5EF4-FFF2-40B4-BE49-F238E27FC236}">
-                <a16:creationId xmlns:a16="http://schemas.microsoft.com/office/drawing/2014/main" id="{37AE2F3C-9CDC-E5D2-BDE8-FE99B389D839}"/>
-              </a:ext>
-            </a:extLst>
-          </p:cNvPr>
-          <p:cNvSpPr txBox="1"/>
-          <p:nvPr/>
-        </p:nvSpPr>
-        <p:spPr>
-          <a:xfrm>
-            <a:off x="180973" y="4048638"/>
-            <a:ext cx="5899903" cy="2031325"/>
-          </a:xfrm>
-          <a:prstGeom prst="rect">
-            <a:avLst/>
-          </a:prstGeom>
-          <a:noFill/>
-          <a:ln w="41275">
-            <a:solidFill>
-              <a:schemeClr val="accent5">
-                <a:lumMod val="75000"/>
-              </a:schemeClr>
-            </a:solidFill>
-          </a:ln>
-        </p:spPr>
-        <p:txBody>
-          <a:bodyPr wrap="square" rtlCol="0">
-            <a:spAutoFit/>
-          </a:bodyPr>
-          <a:lstStyle/>
-          <a:p>
-            <a:r>
-              <a:rPr lang="en-GB" sz="1400" dirty="0">
-                <a:solidFill>
-                  <a:schemeClr val="accent1"/>
-                </a:solidFill>
-              </a:rPr>
-              <a:t>The </a:t>
-            </a:r>
-            <a:r>
-              <a:rPr lang="en-GB" sz="1400" dirty="0" err="1">
-                <a:solidFill>
-                  <a:schemeClr val="accent1"/>
-                </a:solidFill>
-              </a:rPr>
-              <a:t>Rmarkdown</a:t>
-            </a:r>
-            <a:r>
-              <a:rPr lang="en-GB" sz="1400" dirty="0">
-                <a:solidFill>
-                  <a:schemeClr val="accent1"/>
-                </a:solidFill>
-              </a:rPr>
-              <a:t> code</a:t>
-            </a:r>
-          </a:p>
-          <a:p>
-            <a:endParaRPr lang="en-GB" sz="1400" dirty="0">
-              <a:solidFill>
-                <a:schemeClr val="accent1"/>
-              </a:solidFill>
-            </a:endParaRPr>
-          </a:p>
-          <a:p>
-            <a:r>
-              <a:rPr lang="en-GB" sz="1400" dirty="0">
-                <a:solidFill>
-                  <a:schemeClr val="accent1"/>
-                </a:solidFill>
-              </a:rPr>
-              <a:t>Code is enclosed in:  </a:t>
-            </a:r>
-          </a:p>
-          <a:p>
-            <a:endParaRPr lang="en-GB" sz="1400" dirty="0">
-              <a:solidFill>
-                <a:schemeClr val="accent1"/>
-              </a:solidFill>
-            </a:endParaRPr>
-          </a:p>
-          <a:p>
-            <a:endParaRPr lang="en-GB" sz="1400" dirty="0">
-              <a:solidFill>
-                <a:schemeClr val="accent1"/>
-              </a:solidFill>
-            </a:endParaRPr>
-          </a:p>
-          <a:p>
-            <a:endParaRPr lang="en-GB" sz="1400" dirty="0">
-              <a:solidFill>
-                <a:schemeClr val="accent1"/>
-              </a:solidFill>
-            </a:endParaRPr>
-          </a:p>
-          <a:p>
-            <a:endParaRPr lang="en-GB" sz="1400" dirty="0">
-              <a:solidFill>
-                <a:schemeClr val="accent1"/>
-              </a:solidFill>
-            </a:endParaRPr>
-          </a:p>
-          <a:p>
-            <a:r>
-              <a:rPr lang="en-GB" sz="1400" dirty="0">
-                <a:solidFill>
-                  <a:schemeClr val="accent1"/>
-                </a:solidFill>
-              </a:rPr>
-              <a:t>You can control whether code shows, executes, messages and errors are shown and how code output is shown</a:t>
-            </a:r>
-          </a:p>
-        </p:txBody>
-      </p:sp>
-      <p:sp>
-        <p:nvSpPr>
-          <p:cNvPr id="11" name="TextBox 10">
-            <a:extLst>
-              <a:ext uri="{FF2B5EF4-FFF2-40B4-BE49-F238E27FC236}">
-                <a16:creationId xmlns:a16="http://schemas.microsoft.com/office/drawing/2014/main" id="{730B6B9F-6B77-A751-8CEA-878FF495656D}"/>
-              </a:ext>
-            </a:extLst>
-          </p:cNvPr>
-          <p:cNvSpPr txBox="1"/>
-          <p:nvPr/>
-        </p:nvSpPr>
-        <p:spPr>
-          <a:xfrm>
-            <a:off x="1311581" y="6457890"/>
-            <a:ext cx="9697848" cy="400110"/>
-          </a:xfrm>
-          <a:prstGeom prst="rect">
-            <a:avLst/>
-          </a:prstGeom>
-          <a:noFill/>
-        </p:spPr>
-        <p:txBody>
-          <a:bodyPr wrap="none" rtlCol="0">
-            <a:spAutoFit/>
-          </a:bodyPr>
-          <a:lstStyle/>
-          <a:p>
-            <a:r>
-              <a:rPr lang="en-GB" sz="2000" dirty="0"/>
-              <a:t>To get from </a:t>
-            </a:r>
-            <a:r>
-              <a:rPr lang="en-GB" sz="2000" dirty="0" err="1">
-                <a:solidFill>
-                  <a:schemeClr val="accent1"/>
-                </a:solidFill>
-              </a:rPr>
-              <a:t>Rmarkdown</a:t>
-            </a:r>
-            <a:r>
-              <a:rPr lang="en-GB" sz="2000" dirty="0"/>
-              <a:t> to </a:t>
-            </a:r>
-            <a:r>
-              <a:rPr lang="en-US" altLang="zh-CN" sz="2000" dirty="0">
-                <a:solidFill>
-                  <a:schemeClr val="accent6"/>
-                </a:solidFill>
-              </a:rPr>
-              <a:t>HTML</a:t>
-            </a:r>
-            <a:r>
-              <a:rPr lang="en-GB" sz="2000" dirty="0"/>
-              <a:t> you need to render or knit the file (done through </a:t>
-            </a:r>
-            <a:r>
-              <a:rPr lang="en-GB" sz="2000" dirty="0" err="1"/>
-              <a:t>Rstudio</a:t>
-            </a:r>
-            <a:r>
-              <a:rPr lang="en-GB" sz="2000" dirty="0"/>
-              <a:t>)</a:t>
-            </a:r>
-          </a:p>
-        </p:txBody>
-      </p:sp>
-      <p:sp>
-        <p:nvSpPr>
-          <p:cNvPr id="17" name="TextBox 16">
-            <a:extLst>
-              <a:ext uri="{FF2B5EF4-FFF2-40B4-BE49-F238E27FC236}">
-                <a16:creationId xmlns:a16="http://schemas.microsoft.com/office/drawing/2014/main" id="{9DA25D01-6F6C-867A-37ED-2428519693D8}"/>
-              </a:ext>
-            </a:extLst>
-          </p:cNvPr>
-          <p:cNvSpPr txBox="1"/>
-          <p:nvPr/>
-        </p:nvSpPr>
-        <p:spPr>
-          <a:xfrm>
-            <a:off x="2230710" y="1316044"/>
-            <a:ext cx="1847350" cy="369332"/>
-          </a:xfrm>
-          <a:prstGeom prst="rect">
-            <a:avLst/>
-          </a:prstGeom>
-          <a:noFill/>
-        </p:spPr>
-        <p:txBody>
-          <a:bodyPr wrap="square" rtlCol="0">
-            <a:spAutoFit/>
-          </a:bodyPr>
-          <a:lstStyle/>
-          <a:p>
-            <a:pPr algn="ctr"/>
-            <a:r>
-              <a:rPr lang="en-US" altLang="zh-CN" b="1" dirty="0">
-                <a:solidFill>
-                  <a:srgbClr val="FF0000"/>
-                </a:solidFill>
-              </a:rPr>
-              <a:t>R</a:t>
-            </a:r>
-            <a:r>
-              <a:rPr lang="zh-CN" altLang="en-US" b="1" dirty="0">
-                <a:solidFill>
-                  <a:srgbClr val="FF0000"/>
-                </a:solidFill>
-              </a:rPr>
-              <a:t> </a:t>
-            </a:r>
-            <a:r>
-              <a:rPr lang="en-US" altLang="zh-CN" b="1" dirty="0">
-                <a:solidFill>
-                  <a:srgbClr val="FF0000"/>
-                </a:solidFill>
-              </a:rPr>
-              <a:t>Markdown</a:t>
-            </a:r>
-            <a:r>
-              <a:rPr lang="zh-CN" altLang="en-US" b="1" dirty="0">
-                <a:solidFill>
-                  <a:srgbClr val="FF0000"/>
-                </a:solidFill>
-              </a:rPr>
-              <a:t> </a:t>
-            </a:r>
-            <a:r>
-              <a:rPr lang="en-US" altLang="zh-CN" b="1" dirty="0">
-                <a:solidFill>
-                  <a:srgbClr val="FF0000"/>
-                </a:solidFill>
-              </a:rPr>
-              <a:t>File</a:t>
-            </a:r>
-            <a:endParaRPr lang="en-US" b="1" dirty="0">
-              <a:solidFill>
-                <a:srgbClr val="FF0000"/>
-              </a:solidFill>
-            </a:endParaRPr>
-          </a:p>
-        </p:txBody>
-      </p:sp>
-      <p:sp>
-        <p:nvSpPr>
-          <p:cNvPr id="18" name="TextBox 17">
-            <a:extLst>
-              <a:ext uri="{FF2B5EF4-FFF2-40B4-BE49-F238E27FC236}">
-                <a16:creationId xmlns:a16="http://schemas.microsoft.com/office/drawing/2014/main" id="{31B31621-0536-99B9-5404-271F6BCE6A78}"/>
-              </a:ext>
-            </a:extLst>
-          </p:cNvPr>
-          <p:cNvSpPr txBox="1"/>
-          <p:nvPr/>
-        </p:nvSpPr>
-        <p:spPr>
-          <a:xfrm>
-            <a:off x="8131872" y="1319487"/>
-            <a:ext cx="1719072" cy="369332"/>
-          </a:xfrm>
-          <a:prstGeom prst="rect">
-            <a:avLst/>
-          </a:prstGeom>
-          <a:noFill/>
-        </p:spPr>
-        <p:txBody>
-          <a:bodyPr wrap="square" rtlCol="0">
-            <a:spAutoFit/>
-          </a:bodyPr>
-          <a:lstStyle/>
-          <a:p>
-            <a:pPr algn="ctr"/>
-            <a:r>
-              <a:rPr lang="en-US" b="1" dirty="0">
-                <a:solidFill>
-                  <a:srgbClr val="FF0000"/>
-                </a:solidFill>
-              </a:rPr>
-              <a:t>HTML</a:t>
-            </a:r>
-            <a:r>
-              <a:rPr lang="zh-CN" altLang="en-US" b="1" dirty="0">
-                <a:solidFill>
-                  <a:srgbClr val="FF0000"/>
-                </a:solidFill>
-              </a:rPr>
-              <a:t> </a:t>
-            </a:r>
-            <a:r>
-              <a:rPr lang="en-US" altLang="zh-CN" b="1" dirty="0">
-                <a:solidFill>
-                  <a:srgbClr val="FF0000"/>
-                </a:solidFill>
-              </a:rPr>
-              <a:t>Output</a:t>
-            </a:r>
-            <a:endParaRPr lang="en-US" b="1" dirty="0">
-              <a:solidFill>
-                <a:srgbClr val="FF0000"/>
-              </a:solidFill>
-            </a:endParaRPr>
-          </a:p>
-        </p:txBody>
-      </p:sp>
-      <p:sp>
-        <p:nvSpPr>
-          <p:cNvPr id="20" name="Circular Arrow 19">
-            <a:extLst>
-              <a:ext uri="{FF2B5EF4-FFF2-40B4-BE49-F238E27FC236}">
-                <a16:creationId xmlns:a16="http://schemas.microsoft.com/office/drawing/2014/main" id="{4A7A3065-F4AB-F0D4-FE8B-EA86E6C1C0C2}"/>
-              </a:ext>
-            </a:extLst>
-          </p:cNvPr>
-          <p:cNvSpPr/>
-          <p:nvPr/>
-        </p:nvSpPr>
-        <p:spPr>
-          <a:xfrm flipV="1">
-            <a:off x="5458855" y="5476363"/>
-            <a:ext cx="1274290" cy="1060263"/>
-          </a:xfrm>
-          <a:prstGeom prst="circularArrow">
-            <a:avLst/>
-          </a:prstGeom>
-          <a:solidFill>
-            <a:schemeClr val="tx1"/>
-          </a:solidFill>
-        </p:spPr>
-        <p:style>
-          <a:lnRef idx="2">
-            <a:schemeClr val="accent1">
-              <a:shade val="50000"/>
-            </a:schemeClr>
-          </a:lnRef>
-          <a:fillRef idx="1">
-            <a:schemeClr val="accent1"/>
-          </a:fillRef>
-          <a:effectRef idx="0">
-            <a:schemeClr val="accent1"/>
-          </a:effectRef>
-          <a:fontRef idx="minor">
-            <a:schemeClr val="lt1"/>
-          </a:fontRef>
-        </p:style>
-        <p:txBody>
-          <a:bodyPr rtlCol="0" anchor="ctr"/>
-          <a:lstStyle/>
-          <a:p>
-            <a:pPr algn="ctr"/>
-            <a:endParaRPr lang="en-US" dirty="0">
-              <a:solidFill>
-                <a:schemeClr val="tx1"/>
-              </a:solidFill>
-            </a:endParaRPr>
-          </a:p>
-        </p:txBody>
-      </p:sp>
-      <p:cxnSp>
-        <p:nvCxnSpPr>
-          <p:cNvPr id="21" name="Straight Arrow Connector 20">
-            <a:extLst>
-              <a:ext uri="{FF2B5EF4-FFF2-40B4-BE49-F238E27FC236}">
-                <a16:creationId xmlns:a16="http://schemas.microsoft.com/office/drawing/2014/main" id="{650D0569-B7C1-2FC8-736D-24F146DE28A5}"/>
-              </a:ext>
-            </a:extLst>
-          </p:cNvPr>
-          <p:cNvCxnSpPr>
-            <a:cxnSpLocks/>
-          </p:cNvCxnSpPr>
-          <p:nvPr/>
-        </p:nvCxnSpPr>
-        <p:spPr>
-          <a:xfrm>
-            <a:off x="2379252" y="3743864"/>
-            <a:ext cx="0" cy="304774"/>
-          </a:xfrm>
-          <a:prstGeom prst="straightConnector1">
-            <a:avLst/>
-          </a:prstGeom>
-          <a:ln w="38100">
-            <a:tailEnd type="triangle"/>
-          </a:ln>
-        </p:spPr>
-        <p:style>
-          <a:lnRef idx="1">
-            <a:schemeClr val="accent1"/>
-          </a:lnRef>
-          <a:fillRef idx="0">
-            <a:schemeClr val="accent1"/>
-          </a:fillRef>
-          <a:effectRef idx="0">
-            <a:schemeClr val="accent1"/>
-          </a:effectRef>
-          <a:fontRef idx="minor">
-            <a:schemeClr val="tx1"/>
-          </a:fontRef>
-        </p:style>
-      </p:cxnSp>
-      <p:sp>
-        <p:nvSpPr>
-          <p:cNvPr id="24" name="TextBox 23">
-            <a:extLst>
-              <a:ext uri="{FF2B5EF4-FFF2-40B4-BE49-F238E27FC236}">
-                <a16:creationId xmlns:a16="http://schemas.microsoft.com/office/drawing/2014/main" id="{F455E578-9AD2-9BA5-84BF-48C165D89E44}"/>
-              </a:ext>
-            </a:extLst>
-          </p:cNvPr>
-          <p:cNvSpPr txBox="1"/>
-          <p:nvPr/>
-        </p:nvSpPr>
-        <p:spPr>
-          <a:xfrm>
-            <a:off x="209965" y="4736242"/>
-            <a:ext cx="5802646" cy="646331"/>
-          </a:xfrm>
-          <a:prstGeom prst="rect">
-            <a:avLst/>
-          </a:prstGeom>
-          <a:solidFill>
-            <a:schemeClr val="bg1">
-              <a:lumMod val="85000"/>
-            </a:schemeClr>
-          </a:solidFill>
-        </p:spPr>
-        <p:txBody>
-          <a:bodyPr wrap="square" rtlCol="0">
-            <a:spAutoFit/>
-          </a:bodyPr>
-          <a:lstStyle/>
-          <a:p>
-            <a:r>
-              <a:rPr lang="en-GB" sz="1200" dirty="0">
-                <a:solidFill>
-                  <a:schemeClr val="accent1"/>
-                </a:solidFill>
-                <a:latin typeface="Courier New" panose="02070309020205020404" pitchFamily="49" charset="0"/>
-                <a:cs typeface="Courier New" panose="02070309020205020404" pitchFamily="49" charset="0"/>
-              </a:rPr>
-              <a:t>```{r}</a:t>
-            </a:r>
-          </a:p>
-          <a:p>
-            <a:r>
-              <a:rPr lang="en-US" altLang="zh-CN" sz="1200" dirty="0">
-                <a:solidFill>
-                  <a:schemeClr val="accent1"/>
-                </a:solidFill>
-                <a:latin typeface="Courier New" panose="02070309020205020404" pitchFamily="49" charset="0"/>
-                <a:cs typeface="Courier New" panose="02070309020205020404" pitchFamily="49" charset="0"/>
-              </a:rPr>
-              <a:t>YOUR</a:t>
-            </a:r>
-            <a:r>
-              <a:rPr lang="zh-CN" altLang="en-US" sz="1200" dirty="0">
-                <a:solidFill>
-                  <a:schemeClr val="accent1"/>
-                </a:solidFill>
-                <a:latin typeface="Courier New" panose="02070309020205020404" pitchFamily="49" charset="0"/>
-                <a:cs typeface="Courier New" panose="02070309020205020404" pitchFamily="49" charset="0"/>
-              </a:rPr>
-              <a:t> </a:t>
-            </a:r>
-            <a:r>
-              <a:rPr lang="en-GB" sz="1200" dirty="0">
-                <a:solidFill>
-                  <a:schemeClr val="accent1"/>
-                </a:solidFill>
-                <a:latin typeface="Courier New" panose="02070309020205020404" pitchFamily="49" charset="0"/>
-                <a:cs typeface="Courier New" panose="02070309020205020404" pitchFamily="49" charset="0"/>
-              </a:rPr>
-              <a:t>CODE GOES HERE</a:t>
-            </a:r>
-          </a:p>
-          <a:p>
-            <a:r>
-              <a:rPr lang="en-GB" sz="1200" dirty="0">
-                <a:solidFill>
-                  <a:schemeClr val="accent1"/>
-                </a:solidFill>
-                <a:latin typeface="Courier New" panose="02070309020205020404" pitchFamily="49" charset="0"/>
-                <a:cs typeface="Courier New" panose="02070309020205020404" pitchFamily="49" charset="0"/>
-              </a:rPr>
-              <a:t>```</a:t>
-            </a:r>
-          </a:p>
-        </p:txBody>
-      </p:sp>
-    </p:spTree>
-    <p:extLst>
-      <p:ext uri="{BB962C8B-B14F-4D97-AF65-F5344CB8AC3E}">
-        <p14:creationId xmlns:p14="http://schemas.microsoft.com/office/powerpoint/2010/main" val="3454899495"/>
       </p:ext>
     </p:extLst>
   </p:cSld>
